--- a/poagy.gs+.pptx
+++ b/poagy.gs+.pptx
@@ -25,32 +25,43 @@
     <p:sldId id="269" r:id="rId20"/>
     <p:sldId id="270" r:id="rId21"/>
     <p:sldId id="271" r:id="rId22"/>
+    <p:sldId id="272" r:id="rId23"/>
   </p:sldIdLst>
   <p:sldSz cy="5143500" cx="9144000"/>
   <p:notesSz cx="6858000" cy="9144000"/>
   <p:embeddedFontLst>
     <p:embeddedFont>
       <p:font typeface="Inter"/>
-      <p:regular r:id="rId23"/>
-      <p:bold r:id="rId24"/>
-      <p:italic r:id="rId25"/>
-      <p:boldItalic r:id="rId26"/>
+      <p:regular r:id="rId24"/>
+      <p:bold r:id="rId25"/>
+      <p:italic r:id="rId26"/>
+      <p:boldItalic r:id="rId27"/>
     </p:embeddedFont>
     <p:embeddedFont>
       <p:font typeface="Pacifico"/>
-      <p:regular r:id="rId27"/>
+      <p:regular r:id="rId28"/>
+    </p:embeddedFont>
+    <p:embeddedFont>
+      <p:font typeface="Lexend"/>
+      <p:regular r:id="rId29"/>
+      <p:bold r:id="rId30"/>
+    </p:embeddedFont>
+    <p:embeddedFont>
+      <p:font typeface="Oswald"/>
+      <p:regular r:id="rId31"/>
+      <p:bold r:id="rId32"/>
     </p:embeddedFont>
     <p:embeddedFont>
       <p:font typeface="Inter ExtraLight"/>
-      <p:regular r:id="rId28"/>
-      <p:bold r:id="rId29"/>
-      <p:italic r:id="rId30"/>
-      <p:boldItalic r:id="rId31"/>
+      <p:regular r:id="rId33"/>
+      <p:bold r:id="rId34"/>
+      <p:italic r:id="rId35"/>
+      <p:boldItalic r:id="rId36"/>
     </p:embeddedFont>
     <p:embeddedFont>
       <p:font typeface="Comic Relief"/>
-      <p:regular r:id="rId32"/>
-      <p:bold r:id="rId33"/>
+      <p:regular r:id="rId37"/>
+      <p:bold r:id="rId38"/>
     </p:embeddedFont>
   </p:embeddedFontLst>
   <p:defaultTextStyle>
@@ -849,7 +860,7 @@
   <p:cSld>
     <p:spTree>
       <p:nvGrpSpPr>
-        <p:cNvPr id="241" name="Shape 241"/>
+        <p:cNvPr id="242" name="Shape 242"/>
         <p:cNvGrpSpPr/>
         <p:nvPr/>
       </p:nvGrpSpPr>
@@ -863,7 +874,106 @@
       </p:grpSpPr>
       <p:sp>
         <p:nvSpPr>
-          <p:cNvPr id="242" name="Google Shape;242;h1bccd770e8caf32_0_191:notes"/>
+          <p:cNvPr id="243" name="Google Shape;243;h7af89712a75b0a27_0_0:notes"/>
+          <p:cNvSpPr/>
+          <p:nvPr>
+            <p:ph idx="2" type="sldImg"/>
+          </p:nvPr>
+        </p:nvSpPr>
+        <p:spPr>
+          <a:xfrm>
+            <a:off x="381300" y="685800"/>
+            <a:ext cx="6096000" cy="3429000"/>
+          </a:xfrm>
+          <a:custGeom>
+            <a:rect b="b" l="l" r="r" t="t"/>
+            <a:pathLst>
+              <a:path extrusionOk="0" h="120000" w="120000">
+                <a:moveTo>
+                  <a:pt x="0" y="0"/>
+                </a:moveTo>
+                <a:lnTo>
+                  <a:pt x="120000" y="0"/>
+                </a:lnTo>
+                <a:lnTo>
+                  <a:pt x="120000" y="120000"/>
+                </a:lnTo>
+                <a:lnTo>
+                  <a:pt x="0" y="120000"/>
+                </a:lnTo>
+                <a:close/>
+              </a:path>
+            </a:pathLst>
+          </a:custGeom>
+        </p:spPr>
+      </p:sp>
+      <p:sp>
+        <p:nvSpPr>
+          <p:cNvPr id="244" name="Google Shape;244;h7af89712a75b0a27_0_0:notes"/>
+          <p:cNvSpPr txBox="1"/>
+          <p:nvPr>
+            <p:ph idx="1" type="body"/>
+          </p:nvPr>
+        </p:nvSpPr>
+        <p:spPr>
+          <a:xfrm>
+            <a:off x="685800" y="4343400"/>
+            <a:ext cx="5486400" cy="4114800"/>
+          </a:xfrm>
+          <a:prstGeom prst="rect">
+            <a:avLst/>
+          </a:prstGeom>
+        </p:spPr>
+        <p:txBody>
+          <a:bodyPr anchorCtr="0" anchor="t" bIns="91425" lIns="91425" spcFirstLastPara="1" rIns="91425" wrap="square" tIns="91425">
+            <a:noAutofit/>
+          </a:bodyPr>
+          <a:lstStyle/>
+          <a:p>
+            <a:pPr indent="0" lvl="0" marL="0" rtl="0" algn="l">
+              <a:spcBef>
+                <a:spcPts val="0"/>
+              </a:spcBef>
+              <a:spcAft>
+                <a:spcPts val="0"/>
+              </a:spcAft>
+              <a:buNone/>
+            </a:pPr>
+            <a:r>
+              <a:t/>
+            </a:r>
+            <a:endParaRPr/>
+          </a:p>
+        </p:txBody>
+      </p:sp>
+    </p:spTree>
+  </p:cSld>
+  <p:clrMapOvr>
+    <a:masterClrMapping/>
+  </p:clrMapOvr>
+</p:notes>
+</file>
+
+<file path=ppt/notesSlides/notesSlide11.xml><?xml version="1.0" encoding="utf-8"?>
+<p:notes xmlns:a="http://schemas.openxmlformats.org/drawingml/2006/main" xmlns:r="http://schemas.openxmlformats.org/officeDocument/2006/relationships" xmlns:mc="http://schemas.openxmlformats.org/markup-compatibility/2006" xmlns:mv="urn:schemas-microsoft-com:mac:vml" xmlns:p="http://schemas.openxmlformats.org/presentationml/2006/main" xmlns:c="http://schemas.openxmlformats.org/drawingml/2006/chart" xmlns:dgm="http://schemas.openxmlformats.org/drawingml/2006/diagram" xmlns:o="urn:schemas-microsoft-com:office:office" xmlns:v="urn:schemas-microsoft-com:vml" xmlns:pvml="urn:schemas-microsoft-com:office:powerpoint" xmlns:com="http://schemas.openxmlformats.org/drawingml/2006/compatibility" xmlns:p14="http://schemas.microsoft.com/office/powerpoint/2010/main" xmlns:p15="http://schemas.microsoft.com/office/powerpoint/2012/main" xmlns:ahyp="http://schemas.microsoft.com/office/drawing/2018/hyperlinkcolor" showMasterPhAnim="0" showMasterSp="0">
+  <p:cSld>
+    <p:spTree>
+      <p:nvGrpSpPr>
+        <p:cNvPr id="250" name="Shape 250"/>
+        <p:cNvGrpSpPr/>
+        <p:nvPr/>
+      </p:nvGrpSpPr>
+      <p:grpSpPr>
+        <a:xfrm>
+          <a:off x="0" y="0"/>
+          <a:ext cx="0" cy="0"/>
+          <a:chOff x="0" y="0"/>
+          <a:chExt cx="0" cy="0"/>
+        </a:xfrm>
+      </p:grpSpPr>
+      <p:sp>
+        <p:nvSpPr>
+          <p:cNvPr id="251" name="Google Shape;251;h1bccd770e8caf32_0_191:notes"/>
           <p:cNvSpPr/>
           <p:nvPr>
             <p:ph idx="2" type="sldImg"/>
@@ -908,7 +1018,7 @@
       </p:sp>
       <p:sp>
         <p:nvSpPr>
-          <p:cNvPr id="243" name="Google Shape;243;h1bccd770e8caf32_0_191:notes"/>
+          <p:cNvPr id="252" name="Google Shape;252;h1bccd770e8caf32_0_191:notes"/>
           <p:cNvSpPr txBox="1"/>
           <p:nvPr>
             <p:ph idx="1" type="body"/>
@@ -961,12 +1071,12 @@
 </p:notes>
 </file>
 
-<file path=ppt/notesSlides/notesSlide11.xml><?xml version="1.0" encoding="utf-8"?>
+<file path=ppt/notesSlides/notesSlide12.xml><?xml version="1.0" encoding="utf-8"?>
 <p:notes xmlns:a="http://schemas.openxmlformats.org/drawingml/2006/main" xmlns:r="http://schemas.openxmlformats.org/officeDocument/2006/relationships" xmlns:mc="http://schemas.openxmlformats.org/markup-compatibility/2006" xmlns:mv="urn:schemas-microsoft-com:mac:vml" xmlns:p="http://schemas.openxmlformats.org/presentationml/2006/main" xmlns:c="http://schemas.openxmlformats.org/drawingml/2006/chart" xmlns:dgm="http://schemas.openxmlformats.org/drawingml/2006/diagram" xmlns:o="urn:schemas-microsoft-com:office:office" xmlns:v="urn:schemas-microsoft-com:vml" xmlns:pvml="urn:schemas-microsoft-com:office:powerpoint" xmlns:com="http://schemas.openxmlformats.org/drawingml/2006/compatibility" xmlns:p14="http://schemas.microsoft.com/office/powerpoint/2010/main" xmlns:p15="http://schemas.microsoft.com/office/powerpoint/2012/main" xmlns:ahyp="http://schemas.microsoft.com/office/drawing/2018/hyperlinkcolor" showMasterPhAnim="0" showMasterSp="0">
   <p:cSld>
     <p:spTree>
       <p:nvGrpSpPr>
-        <p:cNvPr id="250" name="Shape 250"/>
+        <p:cNvPr id="259" name="Shape 259"/>
         <p:cNvGrpSpPr/>
         <p:nvPr/>
       </p:nvGrpSpPr>
@@ -980,7 +1090,7 @@
       </p:grpSpPr>
       <p:sp>
         <p:nvSpPr>
-          <p:cNvPr id="251" name="Google Shape;251;h1bccd770e8caf32_0_199:notes"/>
+          <p:cNvPr id="260" name="Google Shape;260;h1bccd770e8caf32_0_199:notes"/>
           <p:cNvSpPr/>
           <p:nvPr>
             <p:ph idx="2" type="sldImg"/>
@@ -1025,7 +1135,7 @@
       </p:sp>
       <p:sp>
         <p:nvSpPr>
-          <p:cNvPr id="252" name="Google Shape;252;h1bccd770e8caf32_0_199:notes"/>
+          <p:cNvPr id="261" name="Google Shape;261;h1bccd770e8caf32_0_199:notes"/>
           <p:cNvSpPr txBox="1"/>
           <p:nvPr>
             <p:ph idx="1" type="body"/>
@@ -1078,12 +1188,12 @@
 </p:notes>
 </file>
 
-<file path=ppt/notesSlides/notesSlide12.xml><?xml version="1.0" encoding="utf-8"?>
+<file path=ppt/notesSlides/notesSlide13.xml><?xml version="1.0" encoding="utf-8"?>
 <p:notes xmlns:a="http://schemas.openxmlformats.org/drawingml/2006/main" xmlns:r="http://schemas.openxmlformats.org/officeDocument/2006/relationships" xmlns:mc="http://schemas.openxmlformats.org/markup-compatibility/2006" xmlns:mv="urn:schemas-microsoft-com:mac:vml" xmlns:p="http://schemas.openxmlformats.org/presentationml/2006/main" xmlns:c="http://schemas.openxmlformats.org/drawingml/2006/chart" xmlns:dgm="http://schemas.openxmlformats.org/drawingml/2006/diagram" xmlns:o="urn:schemas-microsoft-com:office:office" xmlns:v="urn:schemas-microsoft-com:vml" xmlns:pvml="urn:schemas-microsoft-com:office:powerpoint" xmlns:com="http://schemas.openxmlformats.org/drawingml/2006/compatibility" xmlns:p14="http://schemas.microsoft.com/office/powerpoint/2010/main" xmlns:p15="http://schemas.microsoft.com/office/powerpoint/2012/main" xmlns:ahyp="http://schemas.microsoft.com/office/drawing/2018/hyperlinkcolor" showMasterPhAnim="0" showMasterSp="0">
   <p:cSld>
     <p:spTree>
       <p:nvGrpSpPr>
-        <p:cNvPr id="258" name="Shape 258"/>
+        <p:cNvPr id="267" name="Shape 267"/>
         <p:cNvGrpSpPr/>
         <p:nvPr/>
       </p:nvGrpSpPr>
@@ -1097,7 +1207,7 @@
       </p:grpSpPr>
       <p:sp>
         <p:nvSpPr>
-          <p:cNvPr id="259" name="Google Shape;259;h1bccd770e8caf32_0_205:notes"/>
+          <p:cNvPr id="268" name="Google Shape;268;h1bccd770e8caf32_0_205:notes"/>
           <p:cNvSpPr/>
           <p:nvPr>
             <p:ph idx="2" type="sldImg"/>
@@ -1142,7 +1252,7 @@
       </p:sp>
       <p:sp>
         <p:nvSpPr>
-          <p:cNvPr id="260" name="Google Shape;260;h1bccd770e8caf32_0_205:notes"/>
+          <p:cNvPr id="269" name="Google Shape;269;h1bccd770e8caf32_0_205:notes"/>
           <p:cNvSpPr txBox="1"/>
           <p:nvPr>
             <p:ph idx="1" type="body"/>
@@ -1195,12 +1305,12 @@
 </p:notes>
 </file>
 
-<file path=ppt/notesSlides/notesSlide13.xml><?xml version="1.0" encoding="utf-8"?>
+<file path=ppt/notesSlides/notesSlide14.xml><?xml version="1.0" encoding="utf-8"?>
 <p:notes xmlns:a="http://schemas.openxmlformats.org/drawingml/2006/main" xmlns:r="http://schemas.openxmlformats.org/officeDocument/2006/relationships" xmlns:mc="http://schemas.openxmlformats.org/markup-compatibility/2006" xmlns:mv="urn:schemas-microsoft-com:mac:vml" xmlns:p="http://schemas.openxmlformats.org/presentationml/2006/main" xmlns:c="http://schemas.openxmlformats.org/drawingml/2006/chart" xmlns:dgm="http://schemas.openxmlformats.org/drawingml/2006/diagram" xmlns:o="urn:schemas-microsoft-com:office:office" xmlns:v="urn:schemas-microsoft-com:vml" xmlns:pvml="urn:schemas-microsoft-com:office:powerpoint" xmlns:com="http://schemas.openxmlformats.org/drawingml/2006/compatibility" xmlns:p14="http://schemas.microsoft.com/office/powerpoint/2010/main" xmlns:p15="http://schemas.microsoft.com/office/powerpoint/2012/main" xmlns:ahyp="http://schemas.microsoft.com/office/drawing/2018/hyperlinkcolor" showMasterPhAnim="0" showMasterSp="0">
   <p:cSld>
     <p:spTree>
       <p:nvGrpSpPr>
-        <p:cNvPr id="273" name="Shape 273"/>
+        <p:cNvPr id="282" name="Shape 282"/>
         <p:cNvGrpSpPr/>
         <p:nvPr/>
       </p:nvGrpSpPr>
@@ -1214,7 +1324,7 @@
       </p:grpSpPr>
       <p:sp>
         <p:nvSpPr>
-          <p:cNvPr id="274" name="Google Shape;274;h1bccd770e8caf32_0_218:notes"/>
+          <p:cNvPr id="283" name="Google Shape;283;h1bccd770e8caf32_0_218:notes"/>
           <p:cNvSpPr/>
           <p:nvPr>
             <p:ph idx="2" type="sldImg"/>
@@ -1259,7 +1369,7 @@
       </p:sp>
       <p:sp>
         <p:nvSpPr>
-          <p:cNvPr id="275" name="Google Shape;275;h1bccd770e8caf32_0_218:notes"/>
+          <p:cNvPr id="284" name="Google Shape;284;h1bccd770e8caf32_0_218:notes"/>
           <p:cNvSpPr txBox="1"/>
           <p:nvPr>
             <p:ph idx="1" type="body"/>
@@ -1312,12 +1422,12 @@
 </p:notes>
 </file>
 
-<file path=ppt/notesSlides/notesSlide14.xml><?xml version="1.0" encoding="utf-8"?>
+<file path=ppt/notesSlides/notesSlide15.xml><?xml version="1.0" encoding="utf-8"?>
 <p:notes xmlns:a="http://schemas.openxmlformats.org/drawingml/2006/main" xmlns:r="http://schemas.openxmlformats.org/officeDocument/2006/relationships" xmlns:mc="http://schemas.openxmlformats.org/markup-compatibility/2006" xmlns:mv="urn:schemas-microsoft-com:mac:vml" xmlns:p="http://schemas.openxmlformats.org/presentationml/2006/main" xmlns:c="http://schemas.openxmlformats.org/drawingml/2006/chart" xmlns:dgm="http://schemas.openxmlformats.org/drawingml/2006/diagram" xmlns:o="urn:schemas-microsoft-com:office:office" xmlns:v="urn:schemas-microsoft-com:vml" xmlns:pvml="urn:schemas-microsoft-com:office:powerpoint" xmlns:com="http://schemas.openxmlformats.org/drawingml/2006/compatibility" xmlns:p14="http://schemas.microsoft.com/office/powerpoint/2010/main" xmlns:p15="http://schemas.microsoft.com/office/powerpoint/2012/main" xmlns:ahyp="http://schemas.microsoft.com/office/drawing/2018/hyperlinkcolor" showMasterPhAnim="0" showMasterSp="0">
   <p:cSld>
     <p:spTree>
       <p:nvGrpSpPr>
-        <p:cNvPr id="292" name="Shape 292"/>
+        <p:cNvPr id="301" name="Shape 301"/>
         <p:cNvGrpSpPr/>
         <p:nvPr/>
       </p:nvGrpSpPr>
@@ -1331,7 +1441,7 @@
       </p:grpSpPr>
       <p:sp>
         <p:nvSpPr>
-          <p:cNvPr id="293" name="Google Shape;293;h1bccd770e8caf32_0_235:notes"/>
+          <p:cNvPr id="302" name="Google Shape;302;h1bccd770e8caf32_0_235:notes"/>
           <p:cNvSpPr/>
           <p:nvPr>
             <p:ph idx="2" type="sldImg"/>
@@ -1376,7 +1486,7 @@
       </p:sp>
       <p:sp>
         <p:nvSpPr>
-          <p:cNvPr id="294" name="Google Shape;294;h1bccd770e8caf32_0_235:notes"/>
+          <p:cNvPr id="303" name="Google Shape;303;h1bccd770e8caf32_0_235:notes"/>
           <p:cNvSpPr txBox="1"/>
           <p:nvPr>
             <p:ph idx="1" type="body"/>
@@ -1429,12 +1539,12 @@
 </p:notes>
 </file>
 
-<file path=ppt/notesSlides/notesSlide15.xml><?xml version="1.0" encoding="utf-8"?>
+<file path=ppt/notesSlides/notesSlide16.xml><?xml version="1.0" encoding="utf-8"?>
 <p:notes xmlns:a="http://schemas.openxmlformats.org/drawingml/2006/main" xmlns:r="http://schemas.openxmlformats.org/officeDocument/2006/relationships" xmlns:mc="http://schemas.openxmlformats.org/markup-compatibility/2006" xmlns:mv="urn:schemas-microsoft-com:mac:vml" xmlns:p="http://schemas.openxmlformats.org/presentationml/2006/main" xmlns:c="http://schemas.openxmlformats.org/drawingml/2006/chart" xmlns:dgm="http://schemas.openxmlformats.org/drawingml/2006/diagram" xmlns:o="urn:schemas-microsoft-com:office:office" xmlns:v="urn:schemas-microsoft-com:vml" xmlns:pvml="urn:schemas-microsoft-com:office:powerpoint" xmlns:com="http://schemas.openxmlformats.org/drawingml/2006/compatibility" xmlns:p14="http://schemas.microsoft.com/office/powerpoint/2010/main" xmlns:p15="http://schemas.microsoft.com/office/powerpoint/2012/main" xmlns:ahyp="http://schemas.microsoft.com/office/drawing/2018/hyperlinkcolor" showMasterPhAnim="0" showMasterSp="0">
   <p:cSld>
     <p:spTree>
       <p:nvGrpSpPr>
-        <p:cNvPr id="311" name="Shape 311"/>
+        <p:cNvPr id="320" name="Shape 320"/>
         <p:cNvGrpSpPr/>
         <p:nvPr/>
       </p:nvGrpSpPr>
@@ -1448,7 +1558,7 @@
       </p:grpSpPr>
       <p:sp>
         <p:nvSpPr>
-          <p:cNvPr id="312" name="Google Shape;312;h1bccd770e8caf32_0_252:notes"/>
+          <p:cNvPr id="321" name="Google Shape;321;h1bccd770e8caf32_0_252:notes"/>
           <p:cNvSpPr/>
           <p:nvPr>
             <p:ph idx="2" type="sldImg"/>
@@ -1493,7 +1603,7 @@
       </p:sp>
       <p:sp>
         <p:nvSpPr>
-          <p:cNvPr id="313" name="Google Shape;313;h1bccd770e8caf32_0_252:notes"/>
+          <p:cNvPr id="322" name="Google Shape;322;h1bccd770e8caf32_0_252:notes"/>
           <p:cNvSpPr txBox="1"/>
           <p:nvPr>
             <p:ph idx="1" type="body"/>
@@ -1546,12 +1656,12 @@
 </p:notes>
 </file>
 
-<file path=ppt/notesSlides/notesSlide16.xml><?xml version="1.0" encoding="utf-8"?>
+<file path=ppt/notesSlides/notesSlide17.xml><?xml version="1.0" encoding="utf-8"?>
 <p:notes xmlns:a="http://schemas.openxmlformats.org/drawingml/2006/main" xmlns:r="http://schemas.openxmlformats.org/officeDocument/2006/relationships" xmlns:mc="http://schemas.openxmlformats.org/markup-compatibility/2006" xmlns:mv="urn:schemas-microsoft-com:mac:vml" xmlns:p="http://schemas.openxmlformats.org/presentationml/2006/main" xmlns:c="http://schemas.openxmlformats.org/drawingml/2006/chart" xmlns:dgm="http://schemas.openxmlformats.org/drawingml/2006/diagram" xmlns:o="urn:schemas-microsoft-com:office:office" xmlns:v="urn:schemas-microsoft-com:vml" xmlns:pvml="urn:schemas-microsoft-com:office:powerpoint" xmlns:com="http://schemas.openxmlformats.org/drawingml/2006/compatibility" xmlns:p14="http://schemas.microsoft.com/office/powerpoint/2010/main" xmlns:p15="http://schemas.microsoft.com/office/powerpoint/2012/main" xmlns:ahyp="http://schemas.microsoft.com/office/drawing/2018/hyperlinkcolor" showMasterPhAnim="0" showMasterSp="0">
   <p:cSld>
     <p:spTree>
       <p:nvGrpSpPr>
-        <p:cNvPr id="330" name="Shape 330"/>
+        <p:cNvPr id="339" name="Shape 339"/>
         <p:cNvGrpSpPr/>
         <p:nvPr/>
       </p:nvGrpSpPr>
@@ -1565,7 +1675,7 @@
       </p:grpSpPr>
       <p:sp>
         <p:nvSpPr>
-          <p:cNvPr id="331" name="Google Shape;331;h1bccd770e8caf32_0_269:notes"/>
+          <p:cNvPr id="340" name="Google Shape;340;h1bccd770e8caf32_0_269:notes"/>
           <p:cNvSpPr/>
           <p:nvPr>
             <p:ph idx="2" type="sldImg"/>
@@ -1610,7 +1720,7 @@
       </p:sp>
       <p:sp>
         <p:nvSpPr>
-          <p:cNvPr id="332" name="Google Shape;332;h1bccd770e8caf32_0_269:notes"/>
+          <p:cNvPr id="341" name="Google Shape;341;h1bccd770e8caf32_0_269:notes"/>
           <p:cNvSpPr txBox="1"/>
           <p:nvPr>
             <p:ph idx="1" type="body"/>
@@ -1668,7 +1778,7 @@
   <p:cSld>
     <p:spTree>
       <p:nvGrpSpPr>
-        <p:cNvPr id="109" name="Shape 109"/>
+        <p:cNvPr id="108" name="Shape 108"/>
         <p:cNvGrpSpPr/>
         <p:nvPr/>
       </p:nvGrpSpPr>
@@ -1682,7 +1792,7 @@
       </p:grpSpPr>
       <p:sp>
         <p:nvSpPr>
-          <p:cNvPr id="110" name="Google Shape;110;h1bccd770e8caf32_0_27:notes"/>
+          <p:cNvPr id="109" name="Google Shape;109;h1bccd770e8caf32_0_27:notes"/>
           <p:cNvSpPr/>
           <p:nvPr>
             <p:ph idx="2" type="sldImg"/>
@@ -1727,7 +1837,7 @@
       </p:sp>
       <p:sp>
         <p:nvSpPr>
-          <p:cNvPr id="111" name="Google Shape;111;h1bccd770e8caf32_0_27:notes"/>
+          <p:cNvPr id="110" name="Google Shape;110;h1bccd770e8caf32_0_27:notes"/>
           <p:cNvSpPr txBox="1"/>
           <p:nvPr>
             <p:ph idx="1" type="body"/>
@@ -1902,7 +2012,7 @@
   <p:cSld>
     <p:spTree>
       <p:nvGrpSpPr>
-        <p:cNvPr id="146" name="Shape 146"/>
+        <p:cNvPr id="147" name="Shape 147"/>
         <p:cNvGrpSpPr/>
         <p:nvPr/>
       </p:nvGrpSpPr>
@@ -1916,7 +2026,7 @@
       </p:grpSpPr>
       <p:sp>
         <p:nvSpPr>
-          <p:cNvPr id="147" name="Google Shape;147;h1bccd770e8caf32_0_14:notes"/>
+          <p:cNvPr id="148" name="Google Shape;148;h1bccd770e8caf32_0_14:notes"/>
           <p:cNvSpPr/>
           <p:nvPr>
             <p:ph idx="2" type="sldImg"/>
@@ -1961,7 +2071,7 @@
       </p:sp>
       <p:sp>
         <p:nvSpPr>
-          <p:cNvPr id="148" name="Google Shape;148;h1bccd770e8caf32_0_14:notes"/>
+          <p:cNvPr id="149" name="Google Shape;149;h1bccd770e8caf32_0_14:notes"/>
           <p:cNvSpPr txBox="1"/>
           <p:nvPr>
             <p:ph idx="1" type="body"/>
@@ -2019,7 +2129,7 @@
   <p:cSld>
     <p:spTree>
       <p:nvGrpSpPr>
-        <p:cNvPr id="165" name="Shape 165"/>
+        <p:cNvPr id="166" name="Shape 166"/>
         <p:cNvGrpSpPr/>
         <p:nvPr/>
       </p:nvGrpSpPr>
@@ -2033,7 +2143,7 @@
       </p:grpSpPr>
       <p:sp>
         <p:nvSpPr>
-          <p:cNvPr id="166" name="Google Shape;166;h2483a72d626482d5_7_20:notes"/>
+          <p:cNvPr id="167" name="Google Shape;167;h2483a72d626482d5_7_20:notes"/>
           <p:cNvSpPr/>
           <p:nvPr>
             <p:ph idx="2" type="sldImg"/>
@@ -2078,7 +2188,7 @@
       </p:sp>
       <p:sp>
         <p:nvSpPr>
-          <p:cNvPr id="167" name="Google Shape;167;h2483a72d626482d5_7_20:notes"/>
+          <p:cNvPr id="168" name="Google Shape;168;h2483a72d626482d5_7_20:notes"/>
           <p:cNvSpPr txBox="1"/>
           <p:nvPr>
             <p:ph idx="1" type="body"/>
@@ -2136,7 +2246,7 @@
   <p:cSld>
     <p:spTree>
       <p:nvGrpSpPr>
-        <p:cNvPr id="184" name="Shape 184"/>
+        <p:cNvPr id="185" name="Shape 185"/>
         <p:cNvGrpSpPr/>
         <p:nvPr/>
       </p:nvGrpSpPr>
@@ -2150,7 +2260,7 @@
       </p:grpSpPr>
       <p:sp>
         <p:nvSpPr>
-          <p:cNvPr id="185" name="Google Shape;185;h2483a72d626482d5_1_1:notes"/>
+          <p:cNvPr id="186" name="Google Shape;186;h2483a72d626482d5_1_1:notes"/>
           <p:cNvSpPr/>
           <p:nvPr>
             <p:ph idx="2" type="sldImg"/>
@@ -2195,7 +2305,7 @@
       </p:sp>
       <p:sp>
         <p:nvSpPr>
-          <p:cNvPr id="186" name="Google Shape;186;h2483a72d626482d5_1_1:notes"/>
+          <p:cNvPr id="187" name="Google Shape;187;h2483a72d626482d5_1_1:notes"/>
           <p:cNvSpPr txBox="1"/>
           <p:nvPr>
             <p:ph idx="1" type="body"/>
@@ -2253,7 +2363,7 @@
   <p:cSld>
     <p:spTree>
       <p:nvGrpSpPr>
-        <p:cNvPr id="195" name="Shape 195"/>
+        <p:cNvPr id="196" name="Shape 196"/>
         <p:cNvGrpSpPr/>
         <p:nvPr/>
       </p:nvGrpSpPr>
@@ -2267,7 +2377,7 @@
       </p:grpSpPr>
       <p:sp>
         <p:nvSpPr>
-          <p:cNvPr id="196" name="Google Shape;196;h42c0b5c93bfda515_0_88:notes"/>
+          <p:cNvPr id="197" name="Google Shape;197;h42c0b5c93bfda515_0_88:notes"/>
           <p:cNvSpPr/>
           <p:nvPr>
             <p:ph idx="2" type="sldImg"/>
@@ -2312,7 +2422,7 @@
       </p:sp>
       <p:sp>
         <p:nvSpPr>
-          <p:cNvPr id="197" name="Google Shape;197;h42c0b5c93bfda515_0_88:notes"/>
+          <p:cNvPr id="198" name="Google Shape;198;h42c0b5c93bfda515_0_88:notes"/>
           <p:cNvSpPr txBox="1"/>
           <p:nvPr>
             <p:ph idx="1" type="body"/>
@@ -2370,7 +2480,7 @@
   <p:cSld>
     <p:spTree>
       <p:nvGrpSpPr>
-        <p:cNvPr id="208" name="Shape 208"/>
+        <p:cNvPr id="209" name="Shape 209"/>
         <p:cNvGrpSpPr/>
         <p:nvPr/>
       </p:nvGrpSpPr>
@@ -2384,7 +2494,7 @@
       </p:grpSpPr>
       <p:sp>
         <p:nvSpPr>
-          <p:cNvPr id="209" name="Google Shape;209;h42c0b5c93bfda515_0_22:notes"/>
+          <p:cNvPr id="210" name="Google Shape;210;h42c0b5c93bfda515_0_22:notes"/>
           <p:cNvSpPr/>
           <p:nvPr>
             <p:ph idx="2" type="sldImg"/>
@@ -2429,7 +2539,7 @@
       </p:sp>
       <p:sp>
         <p:nvSpPr>
-          <p:cNvPr id="210" name="Google Shape;210;h42c0b5c93bfda515_0_22:notes"/>
+          <p:cNvPr id="211" name="Google Shape;211;h42c0b5c93bfda515_0_22:notes"/>
           <p:cNvSpPr txBox="1"/>
           <p:nvPr>
             <p:ph idx="1" type="body"/>
@@ -2487,7 +2597,7 @@
   <p:cSld>
     <p:spTree>
       <p:nvGrpSpPr>
-        <p:cNvPr id="221" name="Shape 221"/>
+        <p:cNvPr id="222" name="Shape 222"/>
         <p:cNvGrpSpPr/>
         <p:nvPr/>
       </p:nvGrpSpPr>
@@ -2501,7 +2611,7 @@
       </p:grpSpPr>
       <p:sp>
         <p:nvSpPr>
-          <p:cNvPr id="222" name="Google Shape;222;h42c0b5c93bfda515_0_33:notes"/>
+          <p:cNvPr id="223" name="Google Shape;223;h42c0b5c93bfda515_0_33:notes"/>
           <p:cNvSpPr/>
           <p:nvPr>
             <p:ph idx="2" type="sldImg"/>
@@ -2546,7 +2656,7 @@
       </p:sp>
       <p:sp>
         <p:nvSpPr>
-          <p:cNvPr id="223" name="Google Shape;223;h42c0b5c93bfda515_0_33:notes"/>
+          <p:cNvPr id="224" name="Google Shape;224;h42c0b5c93bfda515_0_33:notes"/>
           <p:cNvSpPr txBox="1"/>
           <p:nvPr>
             <p:ph idx="1" type="body"/>
@@ -15324,36 +15434,6 @@
           </a:ln>
         </p:spPr>
       </p:pic>
-      <p:pic>
-        <p:nvPicPr>
-          <p:cNvPr id="108" name="Google Shape;108;p25" title="Welcome Back to Big Universe.wav">
-            <a:hlinkClick r:id="rId12"/>
-          </p:cNvPr>
-          <p:cNvPicPr preferRelativeResize="0"/>
-          <p:nvPr/>
-        </p:nvPicPr>
-        <p:blipFill>
-          <a:blip r:embed="rId13">
-            <a:alphaModFix/>
-          </a:blip>
-          <a:stretch>
-            <a:fillRect/>
-          </a:stretch>
-        </p:blipFill>
-        <p:spPr>
-          <a:xfrm>
-            <a:off x="8020563" y="0"/>
-            <a:ext cx="350400" cy="350400"/>
-          </a:xfrm>
-          <a:prstGeom prst="rect">
-            <a:avLst/>
-          </a:prstGeom>
-          <a:noFill/>
-          <a:ln>
-            <a:noFill/>
-          </a:ln>
-        </p:spPr>
-      </p:pic>
     </p:spTree>
   </p:cSld>
   <p:clrMapOvr>
@@ -15571,7 +15651,7 @@
   <p:cSld>
     <p:spTree>
       <p:nvGrpSpPr>
-        <p:cNvPr id="244" name="Shape 244"/>
+        <p:cNvPr id="245" name="Shape 245"/>
         <p:cNvGrpSpPr/>
         <p:nvPr/>
       </p:nvGrpSpPr>
@@ -15585,7 +15665,289 @@
       </p:grpSpPr>
       <p:sp>
         <p:nvSpPr>
-          <p:cNvPr id="245" name="Google Shape;245;p34"/>
+          <p:cNvPr id="246" name="Google Shape;246;p34"/>
+          <p:cNvSpPr txBox="1"/>
+          <p:nvPr/>
+        </p:nvSpPr>
+        <p:spPr>
+          <a:xfrm>
+            <a:off x="645100" y="526100"/>
+            <a:ext cx="2718300" cy="676500"/>
+          </a:xfrm>
+          <a:prstGeom prst="rect">
+            <a:avLst/>
+          </a:prstGeom>
+          <a:noFill/>
+          <a:ln>
+            <a:noFill/>
+          </a:ln>
+        </p:spPr>
+        <p:txBody>
+          <a:bodyPr anchorCtr="0" anchor="t" bIns="91425" lIns="91425" spcFirstLastPara="1" rIns="91425" wrap="square" tIns="91425">
+            <a:noAutofit/>
+          </a:bodyPr>
+          <a:lstStyle/>
+          <a:p>
+            <a:pPr indent="0" lvl="0" marL="0" rtl="0" algn="l">
+              <a:spcBef>
+                <a:spcPts val="0"/>
+              </a:spcBef>
+              <a:spcAft>
+                <a:spcPts val="0"/>
+              </a:spcAft>
+              <a:buNone/>
+            </a:pPr>
+            <a:r>
+              <a:rPr lang="en" sz="1800">
+                <a:solidFill>
+                  <a:schemeClr val="dk2"/>
+                </a:solidFill>
+                <a:latin typeface="Lexend"/>
+                <a:ea typeface="Lexend"/>
+                <a:cs typeface="Lexend"/>
+                <a:sym typeface="Lexend"/>
+              </a:rPr>
+              <a:t>p</a:t>
+            </a:r>
+            <a:r>
+              <a:rPr lang="en" sz="1800">
+                <a:solidFill>
+                  <a:schemeClr val="dk2"/>
+                </a:solidFill>
+                <a:latin typeface="Lexend"/>
+                <a:ea typeface="Lexend"/>
+                <a:cs typeface="Lexend"/>
+                <a:sym typeface="Lexend"/>
+              </a:rPr>
+              <a:t>oagy pantry defense</a:t>
+            </a:r>
+            <a:endParaRPr sz="1800">
+              <a:solidFill>
+                <a:schemeClr val="dk2"/>
+              </a:solidFill>
+              <a:latin typeface="Lexend"/>
+              <a:ea typeface="Lexend"/>
+              <a:cs typeface="Lexend"/>
+              <a:sym typeface="Lexend"/>
+            </a:endParaRPr>
+          </a:p>
+        </p:txBody>
+      </p:sp>
+      <p:sp>
+        <p:nvSpPr>
+          <p:cNvPr id="247" name="Google Shape;247;p34"/>
+          <p:cNvSpPr txBox="1"/>
+          <p:nvPr/>
+        </p:nvSpPr>
+        <p:spPr>
+          <a:xfrm>
+            <a:off x="695200" y="908125"/>
+            <a:ext cx="2618100" cy="269400"/>
+          </a:xfrm>
+          <a:prstGeom prst="rect">
+            <a:avLst/>
+          </a:prstGeom>
+          <a:noFill/>
+          <a:ln>
+            <a:noFill/>
+          </a:ln>
+        </p:spPr>
+        <p:txBody>
+          <a:bodyPr anchorCtr="0" anchor="ctr" bIns="91425" lIns="91425" spcFirstLastPara="1" rIns="91425" wrap="square" tIns="91425">
+            <a:noAutofit/>
+          </a:bodyPr>
+          <a:lstStyle/>
+          <a:p>
+            <a:pPr indent="0" lvl="0" marL="0" rtl="0" algn="ctr">
+              <a:spcBef>
+                <a:spcPts val="0"/>
+              </a:spcBef>
+              <a:spcAft>
+                <a:spcPts val="0"/>
+              </a:spcAft>
+              <a:buNone/>
+            </a:pPr>
+            <a:r>
+              <a:rPr lang="en" sz="1200">
+                <a:solidFill>
+                  <a:schemeClr val="dk2"/>
+                </a:solidFill>
+              </a:rPr>
+              <a:t>Protect the pantry from the poags!</a:t>
+            </a:r>
+            <a:endParaRPr sz="1200">
+              <a:solidFill>
+                <a:schemeClr val="dk2"/>
+              </a:solidFill>
+            </a:endParaRPr>
+          </a:p>
+        </p:txBody>
+      </p:sp>
+      <p:sp>
+        <p:nvSpPr>
+          <p:cNvPr id="248" name="Google Shape;248;p34"/>
+          <p:cNvSpPr/>
+          <p:nvPr/>
+        </p:nvSpPr>
+        <p:spPr>
+          <a:xfrm>
+            <a:off x="654400" y="3438375"/>
+            <a:ext cx="2699700" cy="976500"/>
+          </a:xfrm>
+          <a:prstGeom prst="roundRect">
+            <a:avLst>
+              <a:gd fmla="val 16667" name="adj"/>
+            </a:avLst>
+          </a:prstGeom>
+          <a:gradFill>
+            <a:gsLst>
+              <a:gs pos="0">
+                <a:srgbClr val="FDECDB"/>
+              </a:gs>
+              <a:gs pos="100000">
+                <a:srgbClr val="F0A963"/>
+              </a:gs>
+            </a:gsLst>
+            <a:path path="circle">
+              <a:fillToRect b="50%" l="50%" r="50%" t="50%"/>
+            </a:path>
+            <a:tileRect/>
+          </a:gradFill>
+          <a:ln cap="flat" cmpd="sng" w="9525">
+            <a:solidFill>
+              <a:srgbClr val="595959"/>
+            </a:solidFill>
+            <a:prstDash val="solid"/>
+            <a:round/>
+            <a:headEnd len="sm" w="sm" type="none"/>
+            <a:tailEnd len="sm" w="sm" type="none"/>
+          </a:ln>
+        </p:spPr>
+        <p:txBody>
+          <a:bodyPr anchorCtr="0" anchor="ctr" bIns="91425" lIns="91425" spcFirstLastPara="1" rIns="91425" wrap="square" tIns="91425">
+            <a:noAutofit/>
+          </a:bodyPr>
+          <a:lstStyle/>
+          <a:p>
+            <a:pPr indent="0" lvl="0" marL="0" rtl="0" algn="ctr">
+              <a:spcBef>
+                <a:spcPts val="0"/>
+              </a:spcBef>
+              <a:spcAft>
+                <a:spcPts val="0"/>
+              </a:spcAft>
+              <a:buNone/>
+            </a:pPr>
+            <a:r>
+              <a:rPr lang="en">
+                <a:solidFill>
+                  <a:srgbClr val="FF00FF"/>
+                </a:solidFill>
+                <a:latin typeface="Oswald"/>
+                <a:ea typeface="Oswald"/>
+                <a:cs typeface="Oswald"/>
+                <a:sym typeface="Oswald"/>
+              </a:rPr>
+              <a:t>Play!</a:t>
+            </a:r>
+            <a:endParaRPr>
+              <a:solidFill>
+                <a:srgbClr val="FF00FF"/>
+              </a:solidFill>
+              <a:latin typeface="Oswald"/>
+              <a:ea typeface="Oswald"/>
+              <a:cs typeface="Oswald"/>
+              <a:sym typeface="Oswald"/>
+            </a:endParaRPr>
+          </a:p>
+        </p:txBody>
+      </p:sp>
+      <p:sp>
+        <p:nvSpPr>
+          <p:cNvPr id="249" name="Google Shape;249;p34"/>
+          <p:cNvSpPr txBox="1"/>
+          <p:nvPr/>
+        </p:nvSpPr>
+        <p:spPr>
+          <a:xfrm>
+            <a:off x="0" y="-6275"/>
+            <a:ext cx="1847700" cy="269400"/>
+          </a:xfrm>
+          <a:prstGeom prst="rect">
+            <a:avLst/>
+          </a:prstGeom>
+          <a:noFill/>
+          <a:ln>
+            <a:noFill/>
+          </a:ln>
+        </p:spPr>
+        <p:txBody>
+          <a:bodyPr anchorCtr="0" anchor="t" bIns="91425" lIns="91425" spcFirstLastPara="1" rIns="91425" wrap="square" tIns="91425">
+            <a:noAutofit/>
+          </a:bodyPr>
+          <a:lstStyle/>
+          <a:p>
+            <a:pPr indent="0" lvl="0" marL="0" rtl="0" algn="l">
+              <a:spcBef>
+                <a:spcPts val="0"/>
+              </a:spcBef>
+              <a:spcAft>
+                <a:spcPts val="0"/>
+              </a:spcAft>
+              <a:buNone/>
+            </a:pPr>
+            <a:r>
+              <a:rPr lang="en" sz="600">
+                <a:solidFill>
+                  <a:schemeClr val="dk2"/>
+                </a:solidFill>
+              </a:rPr>
+              <a:t>Early title screen. Not for final </a:t>
+            </a:r>
+            <a:r>
+              <a:rPr lang="en" sz="600">
+                <a:solidFill>
+                  <a:schemeClr val="dk2"/>
+                </a:solidFill>
+              </a:rPr>
+              <a:t>release.</a:t>
+            </a:r>
+            <a:endParaRPr sz="600">
+              <a:solidFill>
+                <a:schemeClr val="dk2"/>
+              </a:solidFill>
+            </a:endParaRPr>
+          </a:p>
+        </p:txBody>
+      </p:sp>
+    </p:spTree>
+  </p:cSld>
+  <p:clrMapOvr>
+    <a:masterClrMapping/>
+  </p:clrMapOvr>
+</p:sld>
+</file>
+
+<file path=ppt/slides/slide11.xml><?xml version="1.0" encoding="utf-8"?>
+<p:sld xmlns:a="http://schemas.openxmlformats.org/drawingml/2006/main" xmlns:r="http://schemas.openxmlformats.org/officeDocument/2006/relationships" xmlns:mc="http://schemas.openxmlformats.org/markup-compatibility/2006" xmlns:mv="urn:schemas-microsoft-com:mac:vml" xmlns:p="http://schemas.openxmlformats.org/presentationml/2006/main" xmlns:c="http://schemas.openxmlformats.org/drawingml/2006/chart" xmlns:dgm="http://schemas.openxmlformats.org/drawingml/2006/diagram" xmlns:o="urn:schemas-microsoft-com:office:office" xmlns:v="urn:schemas-microsoft-com:vml" xmlns:pvml="urn:schemas-microsoft-com:office:powerpoint" xmlns:com="http://schemas.openxmlformats.org/drawingml/2006/compatibility" xmlns:p14="http://schemas.microsoft.com/office/powerpoint/2010/main" xmlns:p15="http://schemas.microsoft.com/office/powerpoint/2012/main" xmlns:ahyp="http://schemas.microsoft.com/office/drawing/2018/hyperlinkcolor">
+  <p:cSld>
+    <p:spTree>
+      <p:nvGrpSpPr>
+        <p:cNvPr id="253" name="Shape 253"/>
+        <p:cNvGrpSpPr/>
+        <p:nvPr/>
+      </p:nvGrpSpPr>
+      <p:grpSpPr>
+        <a:xfrm>
+          <a:off x="0" y="0"/>
+          <a:ext cx="0" cy="0"/>
+          <a:chOff x="0" y="0"/>
+          <a:chExt cx="0" cy="0"/>
+        </a:xfrm>
+      </p:grpSpPr>
+      <p:sp>
+        <p:nvSpPr>
+          <p:cNvPr id="254" name="Google Shape;254;p35"/>
           <p:cNvSpPr txBox="1"/>
           <p:nvPr/>
         </p:nvSpPr>
@@ -15651,7 +16013,7 @@
       </p:sp>
       <p:sp>
         <p:nvSpPr>
-          <p:cNvPr id="246" name="Google Shape;246;p34"/>
+          <p:cNvPr id="255" name="Google Shape;255;p35"/>
           <p:cNvSpPr txBox="1"/>
           <p:nvPr/>
         </p:nvSpPr>
@@ -15717,7 +16079,7 @@
       </p:sp>
       <p:sp>
         <p:nvSpPr>
-          <p:cNvPr id="247" name="Google Shape;247;p34"/>
+          <p:cNvPr id="256" name="Google Shape;256;p35"/>
           <p:cNvSpPr txBox="1"/>
           <p:nvPr/>
         </p:nvSpPr>
@@ -15783,7 +16145,7 @@
       </p:sp>
       <p:sp>
         <p:nvSpPr>
-          <p:cNvPr id="248" name="Google Shape;248;p34"/>
+          <p:cNvPr id="257" name="Google Shape;257;p35"/>
           <p:cNvSpPr/>
           <p:nvPr/>
         </p:nvSpPr>
@@ -15850,7 +16212,7 @@
       </p:sp>
       <p:sp>
         <p:nvSpPr>
-          <p:cNvPr id="249" name="Google Shape;249;p34">
+          <p:cNvPr id="258" name="Google Shape;258;p35">
             <a:hlinkClick action="ppaction://hlinksldjump" r:id="rId3"/>
           </p:cNvPr>
           <p:cNvSpPr/>
@@ -15915,12 +16277,12 @@
 </p:sld>
 </file>
 
-<file path=ppt/slides/slide11.xml><?xml version="1.0" encoding="utf-8"?>
+<file path=ppt/slides/slide12.xml><?xml version="1.0" encoding="utf-8"?>
 <p:sld xmlns:a="http://schemas.openxmlformats.org/drawingml/2006/main" xmlns:r="http://schemas.openxmlformats.org/officeDocument/2006/relationships" xmlns:mc="http://schemas.openxmlformats.org/markup-compatibility/2006" xmlns:mv="urn:schemas-microsoft-com:mac:vml" xmlns:p="http://schemas.openxmlformats.org/presentationml/2006/main" xmlns:c="http://schemas.openxmlformats.org/drawingml/2006/chart" xmlns:dgm="http://schemas.openxmlformats.org/drawingml/2006/diagram" xmlns:o="urn:schemas-microsoft-com:office:office" xmlns:v="urn:schemas-microsoft-com:vml" xmlns:pvml="urn:schemas-microsoft-com:office:powerpoint" xmlns:com="http://schemas.openxmlformats.org/drawingml/2006/compatibility" xmlns:p14="http://schemas.microsoft.com/office/powerpoint/2010/main" xmlns:p15="http://schemas.microsoft.com/office/powerpoint/2012/main" xmlns:ahyp="http://schemas.microsoft.com/office/drawing/2018/hyperlinkcolor">
   <p:cSld>
     <p:spTree>
       <p:nvGrpSpPr>
-        <p:cNvPr id="253" name="Shape 253"/>
+        <p:cNvPr id="262" name="Shape 262"/>
         <p:cNvGrpSpPr/>
         <p:nvPr/>
       </p:nvGrpSpPr>
@@ -15934,7 +16296,7 @@
       </p:grpSpPr>
       <p:sp>
         <p:nvSpPr>
-          <p:cNvPr id="254" name="Google Shape;254;p35"/>
+          <p:cNvPr id="263" name="Google Shape;263;p36"/>
           <p:cNvSpPr/>
           <p:nvPr/>
         </p:nvSpPr>
@@ -16008,7 +16370,7 @@
       </p:sp>
       <p:sp>
         <p:nvSpPr>
-          <p:cNvPr id="255" name="Google Shape;255;p35">
+          <p:cNvPr id="264" name="Google Shape;264;p36">
             <a:hlinkClick action="ppaction://hlinksldjump" r:id="rId3"/>
           </p:cNvPr>
           <p:cNvSpPr/>
@@ -16132,7 +16494,7 @@
       </p:sp>
       <p:sp>
         <p:nvSpPr>
-          <p:cNvPr id="256" name="Google Shape;256;p35">
+          <p:cNvPr id="265" name="Google Shape;265;p36">
             <a:hlinkClick action="ppaction://hlinksldjump" r:id="rId4"/>
           </p:cNvPr>
           <p:cNvSpPr/>
@@ -16256,7 +16618,7 @@
       </p:sp>
       <p:sp>
         <p:nvSpPr>
-          <p:cNvPr id="257" name="Google Shape;257;p35">
+          <p:cNvPr id="266" name="Google Shape;266;p36">
             <a:hlinkClick action="ppaction://hlinksldjump" r:id="rId5"/>
           </p:cNvPr>
           <p:cNvSpPr/>
@@ -16321,12 +16683,12 @@
 </p:sld>
 </file>
 
-<file path=ppt/slides/slide12.xml><?xml version="1.0" encoding="utf-8"?>
+<file path=ppt/slides/slide13.xml><?xml version="1.0" encoding="utf-8"?>
 <p:sld xmlns:a="http://schemas.openxmlformats.org/drawingml/2006/main" xmlns:r="http://schemas.openxmlformats.org/officeDocument/2006/relationships" xmlns:mc="http://schemas.openxmlformats.org/markup-compatibility/2006" xmlns:mv="urn:schemas-microsoft-com:mac:vml" xmlns:p="http://schemas.openxmlformats.org/presentationml/2006/main" xmlns:c="http://schemas.openxmlformats.org/drawingml/2006/chart" xmlns:dgm="http://schemas.openxmlformats.org/drawingml/2006/diagram" xmlns:o="urn:schemas-microsoft-com:office:office" xmlns:v="urn:schemas-microsoft-com:vml" xmlns:pvml="urn:schemas-microsoft-com:office:powerpoint" xmlns:com="http://schemas.openxmlformats.org/drawingml/2006/compatibility" xmlns:p14="http://schemas.microsoft.com/office/powerpoint/2010/main" xmlns:p15="http://schemas.microsoft.com/office/powerpoint/2012/main" xmlns:ahyp="http://schemas.microsoft.com/office/drawing/2018/hyperlinkcolor">
   <p:cSld>
     <p:spTree>
       <p:nvGrpSpPr>
-        <p:cNvPr id="261" name="Shape 261"/>
+        <p:cNvPr id="270" name="Shape 270"/>
         <p:cNvGrpSpPr/>
         <p:nvPr/>
       </p:nvGrpSpPr>
@@ -16340,7 +16702,7 @@
       </p:grpSpPr>
       <p:sp>
         <p:nvSpPr>
-          <p:cNvPr id="262" name="Google Shape;262;p36"/>
+          <p:cNvPr id="271" name="Google Shape;271;p37"/>
           <p:cNvSpPr/>
           <p:nvPr/>
         </p:nvSpPr>
@@ -16405,7 +16767,7 @@
       </p:sp>
       <p:sp>
         <p:nvSpPr>
-          <p:cNvPr id="263" name="Google Shape;263;p36"/>
+          <p:cNvPr id="272" name="Google Shape;272;p37"/>
           <p:cNvSpPr/>
           <p:nvPr/>
         </p:nvSpPr>
@@ -16470,7 +16832,7 @@
       </p:sp>
       <p:sp>
         <p:nvSpPr>
-          <p:cNvPr id="264" name="Google Shape;264;p36"/>
+          <p:cNvPr id="273" name="Google Shape;273;p37"/>
           <p:cNvSpPr/>
           <p:nvPr/>
         </p:nvSpPr>
@@ -16535,7 +16897,7 @@
       </p:sp>
       <p:pic>
         <p:nvPicPr>
-          <p:cNvPr id="265" name="Google Shape;265;p36"/>
+          <p:cNvPr id="274" name="Google Shape;274;p37"/>
           <p:cNvPicPr preferRelativeResize="0"/>
           <p:nvPr/>
         </p:nvPicPr>
@@ -16562,7 +16924,7 @@
       </p:pic>
       <p:sp>
         <p:nvSpPr>
-          <p:cNvPr id="266" name="Google Shape;266;p36"/>
+          <p:cNvPr id="275" name="Google Shape;275;p37"/>
           <p:cNvSpPr/>
           <p:nvPr/>
         </p:nvSpPr>
@@ -16636,7 +16998,7 @@
       </p:sp>
       <p:sp>
         <p:nvSpPr>
-          <p:cNvPr id="267" name="Google Shape;267;p36">
+          <p:cNvPr id="276" name="Google Shape;276;p37">
             <a:hlinkClick action="ppaction://hlinksldjump" r:id="rId4"/>
           </p:cNvPr>
           <p:cNvSpPr/>
@@ -16722,7 +17084,7 @@
       </p:sp>
       <p:sp>
         <p:nvSpPr>
-          <p:cNvPr id="268" name="Google Shape;268;p36">
+          <p:cNvPr id="277" name="Google Shape;277;p37">
             <a:hlinkClick action="ppaction://hlinksldjump" r:id="rId5"/>
           </p:cNvPr>
           <p:cNvSpPr/>
@@ -16808,7 +17170,7 @@
       </p:sp>
       <p:sp>
         <p:nvSpPr>
-          <p:cNvPr id="269" name="Google Shape;269;p36">
+          <p:cNvPr id="278" name="Google Shape;278;p37">
             <a:hlinkClick action="ppaction://hlinksldjump" r:id="rId6"/>
           </p:cNvPr>
           <p:cNvSpPr/>
@@ -16894,7 +17256,7 @@
       </p:sp>
       <p:sp>
         <p:nvSpPr>
-          <p:cNvPr id="270" name="Google Shape;270;p36">
+          <p:cNvPr id="279" name="Google Shape;279;p37">
             <a:hlinkClick action="ppaction://hlinksldjump" r:id="rId7"/>
           </p:cNvPr>
           <p:cNvSpPr/>
@@ -16980,7 +17342,7 @@
       </p:sp>
       <p:sp>
         <p:nvSpPr>
-          <p:cNvPr id="271" name="Google Shape;271;p36"/>
+          <p:cNvPr id="280" name="Google Shape;280;p37"/>
           <p:cNvSpPr txBox="1"/>
           <p:nvPr/>
         </p:nvSpPr>
@@ -17086,7 +17448,7 @@
       </p:sp>
       <p:sp>
         <p:nvSpPr>
-          <p:cNvPr id="272" name="Google Shape;272;p36">
+          <p:cNvPr id="281" name="Google Shape;281;p37">
             <a:hlinkClick action="ppaction://hlinksldjump" r:id="rId8"/>
           </p:cNvPr>
           <p:cNvSpPr/>
@@ -17181,7 +17543,7 @@
                                       <p:cBhvr>
                                         <p:cTn dur="3000"/>
                                         <p:tgtEl>
-                                          <p:spTgt spid="271"/>
+                                          <p:spTgt spid="280"/>
                                         </p:tgtEl>
                                       </p:cBhvr>
                                     </p:animEffect>
@@ -17193,7 +17555,7 @@
                                           </p:stCondLst>
                                         </p:cTn>
                                         <p:tgtEl>
-                                          <p:spTgt spid="271"/>
+                                          <p:spTgt spid="280"/>
                                         </p:tgtEl>
                                         <p:attrNameLst>
                                           <p:attrName>style.visibility</p:attrName>
@@ -17237,12 +17599,12 @@
 </p:sld>
 </file>
 
-<file path=ppt/slides/slide13.xml><?xml version="1.0" encoding="utf-8"?>
+<file path=ppt/slides/slide14.xml><?xml version="1.0" encoding="utf-8"?>
 <p:sld xmlns:a="http://schemas.openxmlformats.org/drawingml/2006/main" xmlns:r="http://schemas.openxmlformats.org/officeDocument/2006/relationships" xmlns:mc="http://schemas.openxmlformats.org/markup-compatibility/2006" xmlns:mv="urn:schemas-microsoft-com:mac:vml" xmlns:p="http://schemas.openxmlformats.org/presentationml/2006/main" xmlns:c="http://schemas.openxmlformats.org/drawingml/2006/chart" xmlns:dgm="http://schemas.openxmlformats.org/drawingml/2006/diagram" xmlns:o="urn:schemas-microsoft-com:office:office" xmlns:v="urn:schemas-microsoft-com:vml" xmlns:pvml="urn:schemas-microsoft-com:office:powerpoint" xmlns:com="http://schemas.openxmlformats.org/drawingml/2006/compatibility" xmlns:p14="http://schemas.microsoft.com/office/powerpoint/2010/main" xmlns:p15="http://schemas.microsoft.com/office/powerpoint/2012/main" xmlns:ahyp="http://schemas.microsoft.com/office/drawing/2018/hyperlinkcolor">
   <p:cSld>
     <p:spTree>
       <p:nvGrpSpPr>
-        <p:cNvPr id="276" name="Shape 276"/>
+        <p:cNvPr id="285" name="Shape 285"/>
         <p:cNvGrpSpPr/>
         <p:nvPr/>
       </p:nvGrpSpPr>
@@ -17256,7 +17618,7 @@
       </p:grpSpPr>
       <p:sp>
         <p:nvSpPr>
-          <p:cNvPr id="277" name="Google Shape;277;p37"/>
+          <p:cNvPr id="286" name="Google Shape;286;p38"/>
           <p:cNvSpPr txBox="1"/>
           <p:nvPr/>
         </p:nvSpPr>
@@ -17362,7 +17724,7 @@
       </p:sp>
       <p:sp>
         <p:nvSpPr>
-          <p:cNvPr id="278" name="Google Shape;278;p37"/>
+          <p:cNvPr id="287" name="Google Shape;287;p38"/>
           <p:cNvSpPr/>
           <p:nvPr/>
         </p:nvSpPr>
@@ -17427,7 +17789,7 @@
       </p:sp>
       <p:sp>
         <p:nvSpPr>
-          <p:cNvPr id="279" name="Google Shape;279;p37"/>
+          <p:cNvPr id="288" name="Google Shape;288;p38"/>
           <p:cNvSpPr/>
           <p:nvPr/>
         </p:nvSpPr>
@@ -17492,7 +17854,7 @@
       </p:sp>
       <p:sp>
         <p:nvSpPr>
-          <p:cNvPr id="280" name="Google Shape;280;p37"/>
+          <p:cNvPr id="289" name="Google Shape;289;p38"/>
           <p:cNvSpPr/>
           <p:nvPr/>
         </p:nvSpPr>
@@ -17557,7 +17919,7 @@
       </p:sp>
       <p:pic>
         <p:nvPicPr>
-          <p:cNvPr id="281" name="Google Shape;281;p37"/>
+          <p:cNvPr id="290" name="Google Shape;290;p38"/>
           <p:cNvPicPr preferRelativeResize="0"/>
           <p:nvPr/>
         </p:nvPicPr>
@@ -17584,7 +17946,7 @@
       </p:pic>
       <p:sp>
         <p:nvSpPr>
-          <p:cNvPr id="282" name="Google Shape;282;p37"/>
+          <p:cNvPr id="291" name="Google Shape;291;p38"/>
           <p:cNvSpPr/>
           <p:nvPr/>
         </p:nvSpPr>
@@ -17658,7 +18020,7 @@
       </p:sp>
       <p:sp>
         <p:nvSpPr>
-          <p:cNvPr id="283" name="Google Shape;283;p37"/>
+          <p:cNvPr id="292" name="Google Shape;292;p38"/>
           <p:cNvSpPr/>
           <p:nvPr/>
         </p:nvSpPr>
@@ -17742,7 +18104,7 @@
       </p:sp>
       <p:sp>
         <p:nvSpPr>
-          <p:cNvPr id="284" name="Google Shape;284;p37"/>
+          <p:cNvPr id="293" name="Google Shape;293;p38"/>
           <p:cNvSpPr/>
           <p:nvPr/>
         </p:nvSpPr>
@@ -17826,7 +18188,7 @@
       </p:sp>
       <p:sp>
         <p:nvSpPr>
-          <p:cNvPr id="285" name="Google Shape;285;p37"/>
+          <p:cNvPr id="294" name="Google Shape;294;p38"/>
           <p:cNvSpPr/>
           <p:nvPr/>
         </p:nvSpPr>
@@ -17910,7 +18272,7 @@
       </p:sp>
       <p:sp>
         <p:nvSpPr>
-          <p:cNvPr id="286" name="Google Shape;286;p37"/>
+          <p:cNvPr id="295" name="Google Shape;295;p38"/>
           <p:cNvSpPr/>
           <p:nvPr/>
         </p:nvSpPr>
@@ -17994,7 +18356,7 @@
       </p:sp>
       <p:grpSp>
         <p:nvGrpSpPr>
-          <p:cNvPr id="287" name="Google Shape;287;p37"/>
+          <p:cNvPr id="296" name="Google Shape;296;p38"/>
           <p:cNvGrpSpPr/>
           <p:nvPr/>
         </p:nvGrpSpPr>
@@ -18008,7 +18370,7 @@
         </p:grpSpPr>
         <p:sp>
           <p:nvSpPr>
-            <p:cNvPr id="288" name="Google Shape;288;p37"/>
+            <p:cNvPr id="297" name="Google Shape;297;p38"/>
             <p:cNvSpPr/>
             <p:nvPr/>
           </p:nvSpPr>
@@ -18153,7 +18515,7 @@
         </p:sp>
         <p:sp>
           <p:nvSpPr>
-            <p:cNvPr id="289" name="Google Shape;289;p37">
+            <p:cNvPr id="298" name="Google Shape;298;p38">
               <a:hlinkClick action="ppaction://hlinksldjump" r:id="rId4"/>
             </p:cNvPr>
             <p:cNvSpPr/>
@@ -18230,7 +18592,7 @@
       </p:grpSp>
       <p:sp>
         <p:nvSpPr>
-          <p:cNvPr id="290" name="Google Shape;290;p37"/>
+          <p:cNvPr id="299" name="Google Shape;299;p38"/>
           <p:cNvSpPr/>
           <p:nvPr/>
         </p:nvSpPr>
@@ -18295,7 +18657,7 @@
       </p:sp>
       <p:sp>
         <p:nvSpPr>
-          <p:cNvPr id="291" name="Google Shape;291;p37">
+          <p:cNvPr id="300" name="Google Shape;300;p38">
             <a:hlinkClick action="ppaction://hlinksldjump" r:id="rId5"/>
           </p:cNvPr>
           <p:cNvSpPr/>
@@ -18390,7 +18752,7 @@
                                       <p:cBhvr additive="base">
                                         <p:cTn dur="2500"/>
                                         <p:tgtEl>
-                                          <p:spTgt spid="281"/>
+                                          <p:spTgt spid="290"/>
                                         </p:tgtEl>
                                         <p:attrNameLst>
                                           <p:attrName>ppt_x</p:attrName>
@@ -18417,7 +18779,7 @@
                                           </p:stCondLst>
                                         </p:cTn>
                                         <p:tgtEl>
-                                          <p:spTgt spid="281"/>
+                                          <p:spTgt spid="290"/>
                                         </p:tgtEl>
                                         <p:attrNameLst>
                                           <p:attrName>style.visibility</p:attrName>
@@ -18453,7 +18815,7 @@
                                           </p:stCondLst>
                                         </p:cTn>
                                         <p:tgtEl>
-                                          <p:spTgt spid="290"/>
+                                          <p:spTgt spid="299"/>
                                         </p:tgtEl>
                                         <p:attrNameLst>
                                           <p:attrName>style.visibility</p:attrName>
@@ -18467,7 +18829,7 @@
                                       <p:cBhvr>
                                         <p:cTn dur="3000"/>
                                         <p:tgtEl>
-                                          <p:spTgt spid="290"/>
+                                          <p:spTgt spid="299"/>
                                         </p:tgtEl>
                                       </p:cBhvr>
                                     </p:animEffect>
@@ -18497,7 +18859,7 @@
                                           </p:stCondLst>
                                         </p:cTn>
                                         <p:tgtEl>
-                                          <p:spTgt spid="287"/>
+                                          <p:spTgt spid="296"/>
                                         </p:tgtEl>
                                         <p:attrNameLst>
                                           <p:attrName>style.visibility</p:attrName>
@@ -18511,7 +18873,7 @@
                                       <p:cBhvr>
                                         <p:cTn dur="500"/>
                                         <p:tgtEl>
-                                          <p:spTgt spid="287"/>
+                                          <p:spTgt spid="296"/>
                                         </p:tgtEl>
                                       </p:cBhvr>
                                     </p:animEffect>
@@ -18549,12 +18911,12 @@
 </p:sld>
 </file>
 
-<file path=ppt/slides/slide14.xml><?xml version="1.0" encoding="utf-8"?>
+<file path=ppt/slides/slide15.xml><?xml version="1.0" encoding="utf-8"?>
 <p:sld xmlns:a="http://schemas.openxmlformats.org/drawingml/2006/main" xmlns:r="http://schemas.openxmlformats.org/officeDocument/2006/relationships" xmlns:mc="http://schemas.openxmlformats.org/markup-compatibility/2006" xmlns:mv="urn:schemas-microsoft-com:mac:vml" xmlns:p="http://schemas.openxmlformats.org/presentationml/2006/main" xmlns:c="http://schemas.openxmlformats.org/drawingml/2006/chart" xmlns:dgm="http://schemas.openxmlformats.org/drawingml/2006/diagram" xmlns:o="urn:schemas-microsoft-com:office:office" xmlns:v="urn:schemas-microsoft-com:vml" xmlns:pvml="urn:schemas-microsoft-com:office:powerpoint" xmlns:com="http://schemas.openxmlformats.org/drawingml/2006/compatibility" xmlns:p14="http://schemas.microsoft.com/office/powerpoint/2010/main" xmlns:p15="http://schemas.microsoft.com/office/powerpoint/2012/main" xmlns:ahyp="http://schemas.microsoft.com/office/drawing/2018/hyperlinkcolor">
   <p:cSld>
     <p:spTree>
       <p:nvGrpSpPr>
-        <p:cNvPr id="295" name="Shape 295"/>
+        <p:cNvPr id="304" name="Shape 304"/>
         <p:cNvGrpSpPr/>
         <p:nvPr/>
       </p:nvGrpSpPr>
@@ -18568,7 +18930,7 @@
       </p:grpSpPr>
       <p:sp>
         <p:nvSpPr>
-          <p:cNvPr id="296" name="Google Shape;296;p38"/>
+          <p:cNvPr id="305" name="Google Shape;305;p39"/>
           <p:cNvSpPr txBox="1"/>
           <p:nvPr/>
         </p:nvSpPr>
@@ -18674,7 +19036,7 @@
       </p:sp>
       <p:sp>
         <p:nvSpPr>
-          <p:cNvPr id="297" name="Google Shape;297;p38"/>
+          <p:cNvPr id="306" name="Google Shape;306;p39"/>
           <p:cNvSpPr/>
           <p:nvPr/>
         </p:nvSpPr>
@@ -18739,7 +19101,7 @@
       </p:sp>
       <p:sp>
         <p:nvSpPr>
-          <p:cNvPr id="298" name="Google Shape;298;p38"/>
+          <p:cNvPr id="307" name="Google Shape;307;p39"/>
           <p:cNvSpPr/>
           <p:nvPr/>
         </p:nvSpPr>
@@ -18804,7 +19166,7 @@
       </p:sp>
       <p:sp>
         <p:nvSpPr>
-          <p:cNvPr id="299" name="Google Shape;299;p38"/>
+          <p:cNvPr id="308" name="Google Shape;308;p39"/>
           <p:cNvSpPr/>
           <p:nvPr/>
         </p:nvSpPr>
@@ -18869,7 +19231,7 @@
       </p:sp>
       <p:pic>
         <p:nvPicPr>
-          <p:cNvPr id="300" name="Google Shape;300;p38"/>
+          <p:cNvPr id="309" name="Google Shape;309;p39"/>
           <p:cNvPicPr preferRelativeResize="0"/>
           <p:nvPr/>
         </p:nvPicPr>
@@ -18896,7 +19258,7 @@
       </p:pic>
       <p:sp>
         <p:nvSpPr>
-          <p:cNvPr id="301" name="Google Shape;301;p38"/>
+          <p:cNvPr id="310" name="Google Shape;310;p39"/>
           <p:cNvSpPr/>
           <p:nvPr/>
         </p:nvSpPr>
@@ -18970,7 +19332,7 @@
       </p:sp>
       <p:sp>
         <p:nvSpPr>
-          <p:cNvPr id="302" name="Google Shape;302;p38"/>
+          <p:cNvPr id="311" name="Google Shape;311;p39"/>
           <p:cNvSpPr/>
           <p:nvPr/>
         </p:nvSpPr>
@@ -19054,7 +19416,7 @@
       </p:sp>
       <p:sp>
         <p:nvSpPr>
-          <p:cNvPr id="303" name="Google Shape;303;p38"/>
+          <p:cNvPr id="312" name="Google Shape;312;p39"/>
           <p:cNvSpPr/>
           <p:nvPr/>
         </p:nvSpPr>
@@ -19138,7 +19500,7 @@
       </p:sp>
       <p:sp>
         <p:nvSpPr>
-          <p:cNvPr id="304" name="Google Shape;304;p38"/>
+          <p:cNvPr id="313" name="Google Shape;313;p39"/>
           <p:cNvSpPr/>
           <p:nvPr/>
         </p:nvSpPr>
@@ -19222,7 +19584,7 @@
       </p:sp>
       <p:sp>
         <p:nvSpPr>
-          <p:cNvPr id="305" name="Google Shape;305;p38"/>
+          <p:cNvPr id="314" name="Google Shape;314;p39"/>
           <p:cNvSpPr/>
           <p:nvPr/>
         </p:nvSpPr>
@@ -19306,7 +19668,7 @@
       </p:sp>
       <p:grpSp>
         <p:nvGrpSpPr>
-          <p:cNvPr id="306" name="Google Shape;306;p38"/>
+          <p:cNvPr id="315" name="Google Shape;315;p39"/>
           <p:cNvGrpSpPr/>
           <p:nvPr/>
         </p:nvGrpSpPr>
@@ -19320,7 +19682,7 @@
         </p:grpSpPr>
         <p:sp>
           <p:nvSpPr>
-            <p:cNvPr id="307" name="Google Shape;307;p38"/>
+            <p:cNvPr id="316" name="Google Shape;316;p39"/>
             <p:cNvSpPr/>
             <p:nvPr/>
           </p:nvSpPr>
@@ -19465,7 +19827,7 @@
         </p:sp>
         <p:sp>
           <p:nvSpPr>
-            <p:cNvPr id="308" name="Google Shape;308;p38">
+            <p:cNvPr id="317" name="Google Shape;317;p39">
               <a:hlinkClick action="ppaction://hlinksldjump" r:id="rId4"/>
             </p:cNvPr>
             <p:cNvSpPr/>
@@ -19542,7 +19904,7 @@
       </p:grpSp>
       <p:sp>
         <p:nvSpPr>
-          <p:cNvPr id="309" name="Google Shape;309;p38"/>
+          <p:cNvPr id="318" name="Google Shape;318;p39"/>
           <p:cNvSpPr/>
           <p:nvPr/>
         </p:nvSpPr>
@@ -19607,7 +19969,7 @@
       </p:sp>
       <p:sp>
         <p:nvSpPr>
-          <p:cNvPr id="310" name="Google Shape;310;p38">
+          <p:cNvPr id="319" name="Google Shape;319;p39">
             <a:hlinkClick action="ppaction://hlinksldjump" r:id="rId5"/>
           </p:cNvPr>
           <p:cNvSpPr/>
@@ -19702,7 +20064,7 @@
                                       <p:cBhvr additive="base">
                                         <p:cTn dur="2500"/>
                                         <p:tgtEl>
-                                          <p:spTgt spid="300"/>
+                                          <p:spTgt spid="309"/>
                                         </p:tgtEl>
                                         <p:attrNameLst>
                                           <p:attrName>ppt_x</p:attrName>
@@ -19729,7 +20091,7 @@
                                           </p:stCondLst>
                                         </p:cTn>
                                         <p:tgtEl>
-                                          <p:spTgt spid="300"/>
+                                          <p:spTgt spid="309"/>
                                         </p:tgtEl>
                                         <p:attrNameLst>
                                           <p:attrName>style.visibility</p:attrName>
@@ -19765,7 +20127,7 @@
                                           </p:stCondLst>
                                         </p:cTn>
                                         <p:tgtEl>
-                                          <p:spTgt spid="309"/>
+                                          <p:spTgt spid="318"/>
                                         </p:tgtEl>
                                         <p:attrNameLst>
                                           <p:attrName>style.visibility</p:attrName>
@@ -19779,7 +20141,7 @@
                                       <p:cBhvr>
                                         <p:cTn dur="3000"/>
                                         <p:tgtEl>
-                                          <p:spTgt spid="309"/>
+                                          <p:spTgt spid="318"/>
                                         </p:tgtEl>
                                       </p:cBhvr>
                                     </p:animEffect>
@@ -19809,7 +20171,7 @@
                                           </p:stCondLst>
                                         </p:cTn>
                                         <p:tgtEl>
-                                          <p:spTgt spid="306"/>
+                                          <p:spTgt spid="315"/>
                                         </p:tgtEl>
                                         <p:attrNameLst>
                                           <p:attrName>style.visibility</p:attrName>
@@ -19823,7 +20185,7 @@
                                       <p:cBhvr>
                                         <p:cTn dur="500"/>
                                         <p:tgtEl>
-                                          <p:spTgt spid="306"/>
+                                          <p:spTgt spid="315"/>
                                         </p:tgtEl>
                                       </p:cBhvr>
                                     </p:animEffect>
@@ -19861,12 +20223,12 @@
 </p:sld>
 </file>
 
-<file path=ppt/slides/slide15.xml><?xml version="1.0" encoding="utf-8"?>
+<file path=ppt/slides/slide16.xml><?xml version="1.0" encoding="utf-8"?>
 <p:sld xmlns:a="http://schemas.openxmlformats.org/drawingml/2006/main" xmlns:r="http://schemas.openxmlformats.org/officeDocument/2006/relationships" xmlns:mc="http://schemas.openxmlformats.org/markup-compatibility/2006" xmlns:mv="urn:schemas-microsoft-com:mac:vml" xmlns:p="http://schemas.openxmlformats.org/presentationml/2006/main" xmlns:c="http://schemas.openxmlformats.org/drawingml/2006/chart" xmlns:dgm="http://schemas.openxmlformats.org/drawingml/2006/diagram" xmlns:o="urn:schemas-microsoft-com:office:office" xmlns:v="urn:schemas-microsoft-com:vml" xmlns:pvml="urn:schemas-microsoft-com:office:powerpoint" xmlns:com="http://schemas.openxmlformats.org/drawingml/2006/compatibility" xmlns:p14="http://schemas.microsoft.com/office/powerpoint/2010/main" xmlns:p15="http://schemas.microsoft.com/office/powerpoint/2012/main" xmlns:ahyp="http://schemas.microsoft.com/office/drawing/2018/hyperlinkcolor">
   <p:cSld>
     <p:spTree>
       <p:nvGrpSpPr>
-        <p:cNvPr id="314" name="Shape 314"/>
+        <p:cNvPr id="323" name="Shape 323"/>
         <p:cNvGrpSpPr/>
         <p:nvPr/>
       </p:nvGrpSpPr>
@@ -19880,7 +20242,7 @@
       </p:grpSpPr>
       <p:sp>
         <p:nvSpPr>
-          <p:cNvPr id="315" name="Google Shape;315;p39"/>
+          <p:cNvPr id="324" name="Google Shape;324;p40"/>
           <p:cNvSpPr txBox="1"/>
           <p:nvPr/>
         </p:nvSpPr>
@@ -19986,7 +20348,7 @@
       </p:sp>
       <p:sp>
         <p:nvSpPr>
-          <p:cNvPr id="316" name="Google Shape;316;p39"/>
+          <p:cNvPr id="325" name="Google Shape;325;p40"/>
           <p:cNvSpPr/>
           <p:nvPr/>
         </p:nvSpPr>
@@ -20051,7 +20413,7 @@
       </p:sp>
       <p:sp>
         <p:nvSpPr>
-          <p:cNvPr id="317" name="Google Shape;317;p39"/>
+          <p:cNvPr id="326" name="Google Shape;326;p40"/>
           <p:cNvSpPr/>
           <p:nvPr/>
         </p:nvSpPr>
@@ -20116,7 +20478,7 @@
       </p:sp>
       <p:sp>
         <p:nvSpPr>
-          <p:cNvPr id="318" name="Google Shape;318;p39"/>
+          <p:cNvPr id="327" name="Google Shape;327;p40"/>
           <p:cNvSpPr/>
           <p:nvPr/>
         </p:nvSpPr>
@@ -20181,7 +20543,7 @@
       </p:sp>
       <p:pic>
         <p:nvPicPr>
-          <p:cNvPr id="319" name="Google Shape;319;p39"/>
+          <p:cNvPr id="328" name="Google Shape;328;p40"/>
           <p:cNvPicPr preferRelativeResize="0"/>
           <p:nvPr/>
         </p:nvPicPr>
@@ -20208,7 +20570,7 @@
       </p:pic>
       <p:sp>
         <p:nvSpPr>
-          <p:cNvPr id="320" name="Google Shape;320;p39"/>
+          <p:cNvPr id="329" name="Google Shape;329;p40"/>
           <p:cNvSpPr/>
           <p:nvPr/>
         </p:nvSpPr>
@@ -20282,7 +20644,7 @@
       </p:sp>
       <p:sp>
         <p:nvSpPr>
-          <p:cNvPr id="321" name="Google Shape;321;p39"/>
+          <p:cNvPr id="330" name="Google Shape;330;p40"/>
           <p:cNvSpPr/>
           <p:nvPr/>
         </p:nvSpPr>
@@ -20366,7 +20728,7 @@
       </p:sp>
       <p:sp>
         <p:nvSpPr>
-          <p:cNvPr id="322" name="Google Shape;322;p39"/>
+          <p:cNvPr id="331" name="Google Shape;331;p40"/>
           <p:cNvSpPr/>
           <p:nvPr/>
         </p:nvSpPr>
@@ -20450,7 +20812,7 @@
       </p:sp>
       <p:sp>
         <p:nvSpPr>
-          <p:cNvPr id="323" name="Google Shape;323;p39"/>
+          <p:cNvPr id="332" name="Google Shape;332;p40"/>
           <p:cNvSpPr/>
           <p:nvPr/>
         </p:nvSpPr>
@@ -20534,7 +20896,7 @@
       </p:sp>
       <p:sp>
         <p:nvSpPr>
-          <p:cNvPr id="324" name="Google Shape;324;p39"/>
+          <p:cNvPr id="333" name="Google Shape;333;p40"/>
           <p:cNvSpPr/>
           <p:nvPr/>
         </p:nvSpPr>
@@ -20618,7 +20980,7 @@
       </p:sp>
       <p:grpSp>
         <p:nvGrpSpPr>
-          <p:cNvPr id="325" name="Google Shape;325;p39"/>
+          <p:cNvPr id="334" name="Google Shape;334;p40"/>
           <p:cNvGrpSpPr/>
           <p:nvPr/>
         </p:nvGrpSpPr>
@@ -20632,7 +20994,7 @@
         </p:grpSpPr>
         <p:sp>
           <p:nvSpPr>
-            <p:cNvPr id="326" name="Google Shape;326;p39"/>
+            <p:cNvPr id="335" name="Google Shape;335;p40"/>
             <p:cNvSpPr/>
             <p:nvPr/>
           </p:nvSpPr>
@@ -20777,7 +21139,7 @@
         </p:sp>
         <p:sp>
           <p:nvSpPr>
-            <p:cNvPr id="327" name="Google Shape;327;p39">
+            <p:cNvPr id="336" name="Google Shape;336;p40">
               <a:hlinkClick action="ppaction://hlinksldjump" r:id="rId4"/>
             </p:cNvPr>
             <p:cNvSpPr/>
@@ -20854,7 +21216,7 @@
       </p:grpSp>
       <p:sp>
         <p:nvSpPr>
-          <p:cNvPr id="328" name="Google Shape;328;p39"/>
+          <p:cNvPr id="337" name="Google Shape;337;p40"/>
           <p:cNvSpPr/>
           <p:nvPr/>
         </p:nvSpPr>
@@ -20919,7 +21281,7 @@
       </p:sp>
       <p:sp>
         <p:nvSpPr>
-          <p:cNvPr id="329" name="Google Shape;329;p39">
+          <p:cNvPr id="338" name="Google Shape;338;p40">
             <a:hlinkClick action="ppaction://hlinksldjump" r:id="rId5"/>
           </p:cNvPr>
           <p:cNvSpPr/>
@@ -21014,7 +21376,7 @@
                                       <p:cBhvr additive="base">
                                         <p:cTn dur="2500"/>
                                         <p:tgtEl>
-                                          <p:spTgt spid="319"/>
+                                          <p:spTgt spid="328"/>
                                         </p:tgtEl>
                                         <p:attrNameLst>
                                           <p:attrName>ppt_y</p:attrName>
@@ -21041,7 +21403,7 @@
                                           </p:stCondLst>
                                         </p:cTn>
                                         <p:tgtEl>
-                                          <p:spTgt spid="319"/>
+                                          <p:spTgt spid="328"/>
                                         </p:tgtEl>
                                         <p:attrNameLst>
                                           <p:attrName>style.visibility</p:attrName>
@@ -21077,7 +21439,7 @@
                                           </p:stCondLst>
                                         </p:cTn>
                                         <p:tgtEl>
-                                          <p:spTgt spid="328"/>
+                                          <p:spTgt spid="337"/>
                                         </p:tgtEl>
                                         <p:attrNameLst>
                                           <p:attrName>style.visibility</p:attrName>
@@ -21091,7 +21453,7 @@
                                       <p:cBhvr>
                                         <p:cTn dur="3000"/>
                                         <p:tgtEl>
-                                          <p:spTgt spid="328"/>
+                                          <p:spTgt spid="337"/>
                                         </p:tgtEl>
                                       </p:cBhvr>
                                     </p:animEffect>
@@ -21121,7 +21483,7 @@
                                           </p:stCondLst>
                                         </p:cTn>
                                         <p:tgtEl>
-                                          <p:spTgt spid="325"/>
+                                          <p:spTgt spid="334"/>
                                         </p:tgtEl>
                                         <p:attrNameLst>
                                           <p:attrName>style.visibility</p:attrName>
@@ -21135,7 +21497,7 @@
                                       <p:cBhvr>
                                         <p:cTn dur="500"/>
                                         <p:tgtEl>
-                                          <p:spTgt spid="325"/>
+                                          <p:spTgt spid="334"/>
                                         </p:tgtEl>
                                       </p:cBhvr>
                                     </p:animEffect>
@@ -21173,12 +21535,12 @@
 </p:sld>
 </file>
 
-<file path=ppt/slides/slide16.xml><?xml version="1.0" encoding="utf-8"?>
+<file path=ppt/slides/slide17.xml><?xml version="1.0" encoding="utf-8"?>
 <p:sld xmlns:a="http://schemas.openxmlformats.org/drawingml/2006/main" xmlns:r="http://schemas.openxmlformats.org/officeDocument/2006/relationships" xmlns:mc="http://schemas.openxmlformats.org/markup-compatibility/2006" xmlns:mv="urn:schemas-microsoft-com:mac:vml" xmlns:p="http://schemas.openxmlformats.org/presentationml/2006/main" xmlns:c="http://schemas.openxmlformats.org/drawingml/2006/chart" xmlns:dgm="http://schemas.openxmlformats.org/drawingml/2006/diagram" xmlns:o="urn:schemas-microsoft-com:office:office" xmlns:v="urn:schemas-microsoft-com:vml" xmlns:pvml="urn:schemas-microsoft-com:office:powerpoint" xmlns:com="http://schemas.openxmlformats.org/drawingml/2006/compatibility" xmlns:p14="http://schemas.microsoft.com/office/powerpoint/2010/main" xmlns:p15="http://schemas.microsoft.com/office/powerpoint/2012/main" xmlns:ahyp="http://schemas.microsoft.com/office/drawing/2018/hyperlinkcolor">
   <p:cSld>
     <p:spTree>
       <p:nvGrpSpPr>
-        <p:cNvPr id="333" name="Shape 333"/>
+        <p:cNvPr id="342" name="Shape 342"/>
         <p:cNvGrpSpPr/>
         <p:nvPr/>
       </p:nvGrpSpPr>
@@ -21192,7 +21554,7 @@
       </p:grpSpPr>
       <p:sp>
         <p:nvSpPr>
-          <p:cNvPr id="334" name="Google Shape;334;p40"/>
+          <p:cNvPr id="343" name="Google Shape;343;p41"/>
           <p:cNvSpPr txBox="1"/>
           <p:nvPr/>
         </p:nvSpPr>
@@ -21298,7 +21660,7 @@
       </p:sp>
       <p:sp>
         <p:nvSpPr>
-          <p:cNvPr id="335" name="Google Shape;335;p40"/>
+          <p:cNvPr id="344" name="Google Shape;344;p41"/>
           <p:cNvSpPr/>
           <p:nvPr/>
         </p:nvSpPr>
@@ -21363,7 +21725,7 @@
       </p:sp>
       <p:sp>
         <p:nvSpPr>
-          <p:cNvPr id="336" name="Google Shape;336;p40"/>
+          <p:cNvPr id="345" name="Google Shape;345;p41"/>
           <p:cNvSpPr/>
           <p:nvPr/>
         </p:nvSpPr>
@@ -21428,7 +21790,7 @@
       </p:sp>
       <p:sp>
         <p:nvSpPr>
-          <p:cNvPr id="337" name="Google Shape;337;p40"/>
+          <p:cNvPr id="346" name="Google Shape;346;p41"/>
           <p:cNvSpPr/>
           <p:nvPr/>
         </p:nvSpPr>
@@ -21493,7 +21855,7 @@
       </p:sp>
       <p:pic>
         <p:nvPicPr>
-          <p:cNvPr id="338" name="Google Shape;338;p40"/>
+          <p:cNvPr id="347" name="Google Shape;347;p41"/>
           <p:cNvPicPr preferRelativeResize="0"/>
           <p:nvPr/>
         </p:nvPicPr>
@@ -21520,7 +21882,7 @@
       </p:pic>
       <p:sp>
         <p:nvSpPr>
-          <p:cNvPr id="339" name="Google Shape;339;p40"/>
+          <p:cNvPr id="348" name="Google Shape;348;p41"/>
           <p:cNvSpPr/>
           <p:nvPr/>
         </p:nvSpPr>
@@ -21594,7 +21956,7 @@
       </p:sp>
       <p:sp>
         <p:nvSpPr>
-          <p:cNvPr id="340" name="Google Shape;340;p40"/>
+          <p:cNvPr id="349" name="Google Shape;349;p41"/>
           <p:cNvSpPr/>
           <p:nvPr/>
         </p:nvSpPr>
@@ -21678,7 +22040,7 @@
       </p:sp>
       <p:sp>
         <p:nvSpPr>
-          <p:cNvPr id="341" name="Google Shape;341;p40"/>
+          <p:cNvPr id="350" name="Google Shape;350;p41"/>
           <p:cNvSpPr/>
           <p:nvPr/>
         </p:nvSpPr>
@@ -21762,7 +22124,7 @@
       </p:sp>
       <p:sp>
         <p:nvSpPr>
-          <p:cNvPr id="342" name="Google Shape;342;p40"/>
+          <p:cNvPr id="351" name="Google Shape;351;p41"/>
           <p:cNvSpPr/>
           <p:nvPr/>
         </p:nvSpPr>
@@ -21846,7 +22208,7 @@
       </p:sp>
       <p:sp>
         <p:nvSpPr>
-          <p:cNvPr id="343" name="Google Shape;343;p40"/>
+          <p:cNvPr id="352" name="Google Shape;352;p41"/>
           <p:cNvSpPr/>
           <p:nvPr/>
         </p:nvSpPr>
@@ -21930,7 +22292,7 @@
       </p:sp>
       <p:grpSp>
         <p:nvGrpSpPr>
-          <p:cNvPr id="344" name="Google Shape;344;p40"/>
+          <p:cNvPr id="353" name="Google Shape;353;p41"/>
           <p:cNvGrpSpPr/>
           <p:nvPr/>
         </p:nvGrpSpPr>
@@ -21944,7 +22306,7 @@
         </p:grpSpPr>
         <p:sp>
           <p:nvSpPr>
-            <p:cNvPr id="345" name="Google Shape;345;p40"/>
+            <p:cNvPr id="354" name="Google Shape;354;p41"/>
             <p:cNvSpPr/>
             <p:nvPr/>
           </p:nvSpPr>
@@ -22089,7 +22451,7 @@
         </p:sp>
         <p:sp>
           <p:nvSpPr>
-            <p:cNvPr id="346" name="Google Shape;346;p40">
+            <p:cNvPr id="355" name="Google Shape;355;p41">
               <a:hlinkClick action="ppaction://hlinksldjump" r:id="rId4"/>
             </p:cNvPr>
             <p:cNvSpPr/>
@@ -22166,7 +22528,7 @@
       </p:grpSp>
       <p:sp>
         <p:nvSpPr>
-          <p:cNvPr id="347" name="Google Shape;347;p40"/>
+          <p:cNvPr id="356" name="Google Shape;356;p41"/>
           <p:cNvSpPr/>
           <p:nvPr/>
         </p:nvSpPr>
@@ -22231,7 +22593,7 @@
       </p:sp>
       <p:sp>
         <p:nvSpPr>
-          <p:cNvPr id="348" name="Google Shape;348;p40">
+          <p:cNvPr id="357" name="Google Shape;357;p41">
             <a:hlinkClick action="ppaction://hlinksldjump" r:id="rId5"/>
           </p:cNvPr>
           <p:cNvSpPr/>
@@ -22326,7 +22688,7 @@
                                       <p:cBhvr additive="base">
                                         <p:cTn dur="2500"/>
                                         <p:tgtEl>
-                                          <p:spTgt spid="338"/>
+                                          <p:spTgt spid="347"/>
                                         </p:tgtEl>
                                         <p:attrNameLst>
                                           <p:attrName>ppt_x</p:attrName>
@@ -22353,7 +22715,7 @@
                                           </p:stCondLst>
                                         </p:cTn>
                                         <p:tgtEl>
-                                          <p:spTgt spid="338"/>
+                                          <p:spTgt spid="347"/>
                                         </p:tgtEl>
                                         <p:attrNameLst>
                                           <p:attrName>style.visibility</p:attrName>
@@ -22389,7 +22751,7 @@
                                           </p:stCondLst>
                                         </p:cTn>
                                         <p:tgtEl>
-                                          <p:spTgt spid="347"/>
+                                          <p:spTgt spid="356"/>
                                         </p:tgtEl>
                                         <p:attrNameLst>
                                           <p:attrName>style.visibility</p:attrName>
@@ -22403,7 +22765,7 @@
                                       <p:cBhvr>
                                         <p:cTn dur="3000"/>
                                         <p:tgtEl>
-                                          <p:spTgt spid="347"/>
+                                          <p:spTgt spid="356"/>
                                         </p:tgtEl>
                                       </p:cBhvr>
                                     </p:animEffect>
@@ -22433,7 +22795,7 @@
                                           </p:stCondLst>
                                         </p:cTn>
                                         <p:tgtEl>
-                                          <p:spTgt spid="344"/>
+                                          <p:spTgt spid="353"/>
                                         </p:tgtEl>
                                         <p:attrNameLst>
                                           <p:attrName>style.visibility</p:attrName>
@@ -22447,7 +22809,7 @@
                                       <p:cBhvr>
                                         <p:cTn dur="500"/>
                                         <p:tgtEl>
-                                          <p:spTgt spid="344"/>
+                                          <p:spTgt spid="353"/>
                                         </p:tgtEl>
                                       </p:cBhvr>
                                     </p:animEffect>
@@ -22490,7 +22852,7 @@
   <p:cSld>
     <p:spTree>
       <p:nvGrpSpPr>
-        <p:cNvPr id="112" name="Shape 112"/>
+        <p:cNvPr id="111" name="Shape 111"/>
         <p:cNvGrpSpPr/>
         <p:nvPr/>
       </p:nvGrpSpPr>
@@ -22504,7 +22866,7 @@
       </p:grpSpPr>
       <p:sp>
         <p:nvSpPr>
-          <p:cNvPr id="113" name="Google Shape;113;p26"/>
+          <p:cNvPr id="112" name="Google Shape;112;p26"/>
           <p:cNvSpPr/>
           <p:nvPr/>
         </p:nvSpPr>
@@ -22580,7 +22942,7 @@
       </p:sp>
       <p:pic>
         <p:nvPicPr>
-          <p:cNvPr id="114" name="Google Shape;114;p26" title="littlepoagy-nobg.png">
+          <p:cNvPr id="113" name="Google Shape;113;p26" title="littlepoagy-nobg.png">
             <a:hlinkClick action="ppaction://hlinksldjump" r:id="rId3"/>
           </p:cNvPr>
           <p:cNvPicPr preferRelativeResize="0"/>
@@ -22609,7 +22971,7 @@
       </p:pic>
       <p:pic>
         <p:nvPicPr>
-          <p:cNvPr id="115" name="Google Shape;115;p26">
+          <p:cNvPr id="114" name="Google Shape;114;p26">
             <a:hlinkClick action="ppaction://hlinksldjump" r:id="rId5"/>
           </p:cNvPr>
           <p:cNvPicPr preferRelativeResize="0"/>
@@ -22638,7 +23000,7 @@
       </p:pic>
       <p:pic>
         <p:nvPicPr>
-          <p:cNvPr id="116" name="Google Shape;116;p26" title="littlepoagy-nobg.png"/>
+          <p:cNvPr id="115" name="Google Shape;115;p26" title="littlepoagy-nobg.png"/>
           <p:cNvPicPr preferRelativeResize="0"/>
           <p:nvPr/>
         </p:nvPicPr>
@@ -22665,7 +23027,7 @@
       </p:pic>
       <p:pic>
         <p:nvPicPr>
-          <p:cNvPr id="117" name="Google Shape;117;p26">
+          <p:cNvPr id="116" name="Google Shape;116;p26">
             <a:hlinkClick action="ppaction://hlinksldjump" r:id="rId7"/>
           </p:cNvPr>
           <p:cNvPicPr preferRelativeResize="0"/>
@@ -22695,7 +23057,7 @@
       </p:pic>
       <p:sp>
         <p:nvSpPr>
-          <p:cNvPr id="118" name="Google Shape;118;p26"/>
+          <p:cNvPr id="117" name="Google Shape;117;p26"/>
           <p:cNvSpPr/>
           <p:nvPr/>
         </p:nvSpPr>
@@ -22744,7 +23106,7 @@
       </p:sp>
       <p:sp>
         <p:nvSpPr>
-          <p:cNvPr id="119" name="Google Shape;119;p26"/>
+          <p:cNvPr id="118" name="Google Shape;118;p26"/>
           <p:cNvSpPr txBox="1"/>
           <p:nvPr/>
         </p:nvSpPr>
@@ -22802,7 +23164,7 @@
       </p:sp>
       <p:sp>
         <p:nvSpPr>
-          <p:cNvPr id="120" name="Google Shape;120;p26"/>
+          <p:cNvPr id="119" name="Google Shape;119;p26"/>
           <p:cNvSpPr txBox="1"/>
           <p:nvPr/>
         </p:nvSpPr>
@@ -22924,7 +23286,7 @@
       </p:sp>
       <p:sp>
         <p:nvSpPr>
-          <p:cNvPr id="121" name="Google Shape;121;p26"/>
+          <p:cNvPr id="120" name="Google Shape;120;p26"/>
           <p:cNvSpPr/>
           <p:nvPr/>
         </p:nvSpPr>
@@ -22974,7 +23336,7 @@
       </p:sp>
       <p:sp>
         <p:nvSpPr>
-          <p:cNvPr id="122" name="Google Shape;122;p26">
+          <p:cNvPr id="121" name="Google Shape;121;p26">
             <a:hlinkClick action="ppaction://hlinksldjump" r:id="rId9"/>
           </p:cNvPr>
           <p:cNvSpPr/>
@@ -23034,7 +23396,7 @@
       </p:sp>
       <p:sp>
         <p:nvSpPr>
-          <p:cNvPr id="123" name="Google Shape;123;p26"/>
+          <p:cNvPr id="122" name="Google Shape;122;p26"/>
           <p:cNvSpPr txBox="1"/>
           <p:nvPr/>
         </p:nvSpPr>
@@ -23092,7 +23454,7 @@
       </p:sp>
       <p:sp>
         <p:nvSpPr>
-          <p:cNvPr id="124" name="Google Shape;124;p26">
+          <p:cNvPr id="123" name="Google Shape;123;p26">
             <a:hlinkClick action="ppaction://hlinksldjump" r:id="rId10"/>
           </p:cNvPr>
           <p:cNvSpPr/>
@@ -23144,7 +23506,7 @@
       </p:sp>
       <p:sp>
         <p:nvSpPr>
-          <p:cNvPr id="125" name="Google Shape;125;p26"/>
+          <p:cNvPr id="124" name="Google Shape;124;p26"/>
           <p:cNvSpPr/>
           <p:nvPr/>
         </p:nvSpPr>
@@ -23202,7 +23564,7 @@
       </p:sp>
       <p:sp>
         <p:nvSpPr>
-          <p:cNvPr id="126" name="Google Shape;126;p26">
+          <p:cNvPr id="125" name="Google Shape;125;p26">
             <a:hlinkClick action="ppaction://hlinksldjump" r:id="rId11"/>
           </p:cNvPr>
           <p:cNvSpPr/>
@@ -23262,7 +23624,7 @@
       </p:sp>
       <p:sp>
         <p:nvSpPr>
-          <p:cNvPr id="127" name="Google Shape;127;p26"/>
+          <p:cNvPr id="126" name="Google Shape;126;p26"/>
           <p:cNvSpPr/>
           <p:nvPr/>
         </p:nvSpPr>
@@ -23315,7 +23677,7 @@
             <a:r>
               <a:rPr lang="en" sz="1000">
                 <a:solidFill>
-                  <a:srgbClr val="999999"/>
+                  <a:srgbClr val="B7B7B7"/>
                 </a:solidFill>
                 <a:latin typeface="Inter"/>
                 <a:ea typeface="Inter"/>
@@ -23326,13 +23688,73 @@
             </a:r>
             <a:endParaRPr sz="1000">
               <a:solidFill>
-                <a:srgbClr val="999999"/>
+                <a:srgbClr val="B7B7B7"/>
               </a:solidFill>
               <a:latin typeface="Inter"/>
               <a:ea typeface="Inter"/>
               <a:cs typeface="Inter"/>
               <a:sym typeface="Inter"/>
             </a:endParaRPr>
+          </a:p>
+        </p:txBody>
+      </p:sp>
+      <p:sp>
+        <p:nvSpPr>
+          <p:cNvPr id="127" name="Google Shape;127;p26">
+            <a:hlinkClick action="ppaction://hlinksldjump" r:id="rId12"/>
+          </p:cNvPr>
+          <p:cNvSpPr/>
+          <p:nvPr/>
+        </p:nvSpPr>
+        <p:spPr>
+          <a:xfrm>
+            <a:off x="7795575" y="4587225"/>
+            <a:ext cx="1348500" cy="556200"/>
+          </a:xfrm>
+          <a:prstGeom prst="rect">
+            <a:avLst/>
+          </a:prstGeom>
+          <a:gradFill>
+            <a:gsLst>
+              <a:gs pos="0">
+                <a:srgbClr val="DCECD5"/>
+              </a:gs>
+              <a:gs pos="100000">
+                <a:srgbClr val="92BC81"/>
+              </a:gs>
+            </a:gsLst>
+            <a:lin ang="5400012" scaled="0"/>
+          </a:gradFill>
+          <a:ln cap="flat" cmpd="sng" w="9525">
+            <a:solidFill>
+              <a:schemeClr val="dk2"/>
+            </a:solidFill>
+            <a:prstDash val="solid"/>
+            <a:round/>
+            <a:headEnd len="sm" w="sm" type="none"/>
+            <a:tailEnd len="sm" w="sm" type="none"/>
+          </a:ln>
+        </p:spPr>
+        <p:txBody>
+          <a:bodyPr anchorCtr="0" anchor="ctr" bIns="91425" lIns="91425" spcFirstLastPara="1" rIns="91425" wrap="square" tIns="91425">
+            <a:noAutofit/>
+          </a:bodyPr>
+          <a:lstStyle/>
+          <a:p>
+            <a:pPr indent="0" lvl="0" marL="0" rtl="0" algn="ctr">
+              <a:spcBef>
+                <a:spcPts val="0"/>
+              </a:spcBef>
+              <a:spcAft>
+                <a:spcPts val="0"/>
+              </a:spcAft>
+              <a:buNone/>
+            </a:pPr>
+            <a:r>
+              <a:rPr lang="en"/>
+              <a:t>Play</a:t>
+            </a:r>
+            <a:endParaRPr/>
           </a:p>
         </p:txBody>
       </p:sp>
@@ -23378,7 +23800,7 @@
                                           </p:stCondLst>
                                         </p:cTn>
                                         <p:tgtEl>
-                                          <p:spTgt spid="118"/>
+                                          <p:spTgt spid="117"/>
                                         </p:tgtEl>
                                         <p:attrNameLst>
                                           <p:attrName>style.visibility</p:attrName>
@@ -23392,7 +23814,7 @@
                                       <p:cBhvr>
                                         <p:cTn dur="300"/>
                                         <p:tgtEl>
-                                          <p:spTgt spid="118"/>
+                                          <p:spTgt spid="117"/>
                                         </p:tgtEl>
                                       </p:cBhvr>
                                     </p:animEffect>
@@ -23418,7 +23840,7 @@
                                       <p:cBhvr>
                                         <p:cTn dur="300"/>
                                         <p:tgtEl>
-                                          <p:spTgt spid="123"/>
+                                          <p:spTgt spid="122"/>
                                         </p:tgtEl>
                                       </p:cBhvr>
                                     </p:animEffect>
@@ -23430,7 +23852,7 @@
                                           </p:stCondLst>
                                         </p:cTn>
                                         <p:tgtEl>
-                                          <p:spTgt spid="123"/>
+                                          <p:spTgt spid="122"/>
                                         </p:tgtEl>
                                         <p:attrNameLst>
                                           <p:attrName>style.visibility</p:attrName>
@@ -24283,6 +24705,66 @@
           </a:p>
         </p:txBody>
       </p:sp>
+      <p:sp>
+        <p:nvSpPr>
+          <p:cNvPr id="146" name="Google Shape;146;p27">
+            <a:hlinkClick action="ppaction://hlinksldjump" r:id="rId12"/>
+          </p:cNvPr>
+          <p:cNvSpPr/>
+          <p:nvPr/>
+        </p:nvSpPr>
+        <p:spPr>
+          <a:xfrm>
+            <a:off x="7795575" y="4587225"/>
+            <a:ext cx="1348500" cy="556200"/>
+          </a:xfrm>
+          <a:prstGeom prst="rect">
+            <a:avLst/>
+          </a:prstGeom>
+          <a:gradFill>
+            <a:gsLst>
+              <a:gs pos="0">
+                <a:srgbClr val="DCECD5"/>
+              </a:gs>
+              <a:gs pos="100000">
+                <a:srgbClr val="92BC81"/>
+              </a:gs>
+            </a:gsLst>
+            <a:lin ang="5400012" scaled="0"/>
+          </a:gradFill>
+          <a:ln cap="flat" cmpd="sng" w="9525">
+            <a:solidFill>
+              <a:schemeClr val="dk2"/>
+            </a:solidFill>
+            <a:prstDash val="solid"/>
+            <a:round/>
+            <a:headEnd len="sm" w="sm" type="none"/>
+            <a:tailEnd len="sm" w="sm" type="none"/>
+          </a:ln>
+        </p:spPr>
+        <p:txBody>
+          <a:bodyPr anchorCtr="0" anchor="ctr" bIns="91425" lIns="91425" spcFirstLastPara="1" rIns="91425" wrap="square" tIns="91425">
+            <a:noAutofit/>
+          </a:bodyPr>
+          <a:lstStyle/>
+          <a:p>
+            <a:pPr indent="0" lvl="0" marL="0" rtl="0" algn="ctr">
+              <a:spcBef>
+                <a:spcPts val="0"/>
+              </a:spcBef>
+              <a:spcAft>
+                <a:spcPts val="0"/>
+              </a:spcAft>
+              <a:buNone/>
+            </a:pPr>
+            <a:r>
+              <a:rPr lang="en"/>
+              <a:t>Play</a:t>
+            </a:r>
+            <a:endParaRPr/>
+          </a:p>
+        </p:txBody>
+      </p:sp>
     </p:spTree>
   </p:cSld>
   <p:clrMapOvr>
@@ -24382,7 +24864,7 @@
   <p:cSld>
     <p:spTree>
       <p:nvGrpSpPr>
-        <p:cNvPr id="149" name="Shape 149"/>
+        <p:cNvPr id="150" name="Shape 150"/>
         <p:cNvGrpSpPr/>
         <p:nvPr/>
       </p:nvGrpSpPr>
@@ -24396,7 +24878,7 @@
       </p:grpSpPr>
       <p:sp>
         <p:nvSpPr>
-          <p:cNvPr id="150" name="Google Shape;150;p28"/>
+          <p:cNvPr id="151" name="Google Shape;151;p28"/>
           <p:cNvSpPr/>
           <p:nvPr/>
         </p:nvSpPr>
@@ -24472,7 +24954,7 @@
       </p:sp>
       <p:pic>
         <p:nvPicPr>
-          <p:cNvPr id="151" name="Google Shape;151;p28" title="littlepoagy-nobg.png">
+          <p:cNvPr id="152" name="Google Shape;152;p28" title="littlepoagy-nobg.png">
             <a:hlinkClick action="ppaction://hlinksldjump" r:id="rId3"/>
           </p:cNvPr>
           <p:cNvPicPr preferRelativeResize="0"/>
@@ -24501,7 +24983,7 @@
       </p:pic>
       <p:pic>
         <p:nvPicPr>
-          <p:cNvPr id="152" name="Google Shape;152;p28">
+          <p:cNvPr id="153" name="Google Shape;153;p28">
             <a:hlinkClick action="ppaction://hlinksldjump" r:id="rId5"/>
           </p:cNvPr>
           <p:cNvPicPr preferRelativeResize="0"/>
@@ -24530,7 +25012,7 @@
       </p:pic>
       <p:pic>
         <p:nvPicPr>
-          <p:cNvPr id="153" name="Google Shape;153;p28" title="littlepoagy-nobg.png"/>
+          <p:cNvPr id="154" name="Google Shape;154;p28" title="littlepoagy-nobg.png"/>
           <p:cNvPicPr preferRelativeResize="0"/>
           <p:nvPr/>
         </p:nvPicPr>
@@ -24557,7 +25039,7 @@
       </p:pic>
       <p:pic>
         <p:nvPicPr>
-          <p:cNvPr id="154" name="Google Shape;154;p28">
+          <p:cNvPr id="155" name="Google Shape;155;p28">
             <a:hlinkClick action="ppaction://hlinksldjump" r:id="rId7"/>
           </p:cNvPr>
           <p:cNvPicPr preferRelativeResize="0"/>
@@ -24587,7 +25069,7 @@
       </p:pic>
       <p:sp>
         <p:nvSpPr>
-          <p:cNvPr id="155" name="Google Shape;155;p28"/>
+          <p:cNvPr id="156" name="Google Shape;156;p28"/>
           <p:cNvSpPr/>
           <p:nvPr/>
         </p:nvSpPr>
@@ -24636,7 +25118,7 @@
       </p:sp>
       <p:sp>
         <p:nvSpPr>
-          <p:cNvPr id="156" name="Google Shape;156;p28"/>
+          <p:cNvPr id="157" name="Google Shape;157;p28"/>
           <p:cNvSpPr txBox="1"/>
           <p:nvPr/>
         </p:nvSpPr>
@@ -24706,7 +25188,7 @@
       </p:sp>
       <p:sp>
         <p:nvSpPr>
-          <p:cNvPr id="157" name="Google Shape;157;p28"/>
+          <p:cNvPr id="158" name="Google Shape;158;p28"/>
           <p:cNvSpPr txBox="1"/>
           <p:nvPr/>
         </p:nvSpPr>
@@ -24828,7 +25310,7 @@
       </p:sp>
       <p:sp>
         <p:nvSpPr>
-          <p:cNvPr id="158" name="Google Shape;158;p28">
+          <p:cNvPr id="159" name="Google Shape;159;p28">
             <a:hlinkClick action="ppaction://hlinksldjump" r:id="rId9"/>
           </p:cNvPr>
           <p:cNvSpPr/>
@@ -24880,7 +25362,7 @@
       </p:sp>
       <p:sp>
         <p:nvSpPr>
-          <p:cNvPr id="159" name="Google Shape;159;p28"/>
+          <p:cNvPr id="160" name="Google Shape;160;p28"/>
           <p:cNvSpPr/>
           <p:nvPr/>
         </p:nvSpPr>
@@ -24938,7 +25420,7 @@
       </p:sp>
       <p:sp>
         <p:nvSpPr>
-          <p:cNvPr id="160" name="Google Shape;160;p28">
+          <p:cNvPr id="161" name="Google Shape;161;p28">
             <a:hlinkClick action="ppaction://hlinksldjump" r:id="rId10"/>
           </p:cNvPr>
           <p:cNvSpPr/>
@@ -24990,7 +25472,7 @@
       </p:sp>
       <p:sp>
         <p:nvSpPr>
-          <p:cNvPr id="161" name="Google Shape;161;p28">
+          <p:cNvPr id="162" name="Google Shape;162;p28">
             <a:hlinkClick action="ppaction://hlinksldjump" r:id="rId11"/>
           </p:cNvPr>
           <p:cNvSpPr/>
@@ -25050,7 +25532,7 @@
       </p:sp>
       <p:sp>
         <p:nvSpPr>
-          <p:cNvPr id="162" name="Google Shape;162;p28"/>
+          <p:cNvPr id="163" name="Google Shape;163;p28"/>
           <p:cNvSpPr/>
           <p:nvPr/>
         </p:nvSpPr>
@@ -25108,7 +25590,7 @@
       </p:sp>
       <p:sp>
         <p:nvSpPr>
-          <p:cNvPr id="163" name="Google Shape;163;p28">
+          <p:cNvPr id="164" name="Google Shape;164;p28">
             <a:hlinkClick action="ppaction://hlinksldjump" r:id="rId12"/>
           </p:cNvPr>
           <p:cNvSpPr/>
@@ -25168,7 +25650,7 @@
       </p:sp>
       <p:sp>
         <p:nvSpPr>
-          <p:cNvPr id="164" name="Google Shape;164;p28"/>
+          <p:cNvPr id="165" name="Google Shape;165;p28"/>
           <p:cNvSpPr/>
           <p:nvPr/>
         </p:nvSpPr>
@@ -25284,7 +25766,7 @@
                                           </p:stCondLst>
                                         </p:cTn>
                                         <p:tgtEl>
-                                          <p:spTgt spid="155"/>
+                                          <p:spTgt spid="156"/>
                                         </p:tgtEl>
                                         <p:attrNameLst>
                                           <p:attrName>style.visibility</p:attrName>
@@ -25298,7 +25780,7 @@
                                       <p:cBhvr>
                                         <p:cTn dur="3000"/>
                                         <p:tgtEl>
-                                          <p:spTgt spid="155"/>
+                                          <p:spTgt spid="156"/>
                                         </p:tgtEl>
                                       </p:cBhvr>
                                     </p:animEffect>
@@ -25328,7 +25810,7 @@
                                           </p:stCondLst>
                                         </p:cTn>
                                         <p:tgtEl>
-                                          <p:spTgt spid="155"/>
+                                          <p:spTgt spid="156"/>
                                         </p:tgtEl>
                                         <p:attrNameLst>
                                           <p:attrName>style.visibility</p:attrName>
@@ -25342,7 +25824,7 @@
                                       <p:cBhvr>
                                         <p:cTn dur="3000"/>
                                         <p:tgtEl>
-                                          <p:spTgt spid="155"/>
+                                          <p:spTgt spid="156"/>
                                         </p:tgtEl>
                                       </p:cBhvr>
                                     </p:animEffect>
@@ -25385,7 +25867,7 @@
   <p:cSld>
     <p:spTree>
       <p:nvGrpSpPr>
-        <p:cNvPr id="168" name="Shape 168"/>
+        <p:cNvPr id="169" name="Shape 169"/>
         <p:cNvGrpSpPr/>
         <p:nvPr/>
       </p:nvGrpSpPr>
@@ -25399,7 +25881,7 @@
       </p:grpSpPr>
       <p:sp>
         <p:nvSpPr>
-          <p:cNvPr id="169" name="Google Shape;169;p29"/>
+          <p:cNvPr id="170" name="Google Shape;170;p29"/>
           <p:cNvSpPr/>
           <p:nvPr/>
         </p:nvSpPr>
@@ -25475,7 +25957,7 @@
       </p:sp>
       <p:pic>
         <p:nvPicPr>
-          <p:cNvPr id="170" name="Google Shape;170;p29" title="littlepoagy-nobg.png">
+          <p:cNvPr id="171" name="Google Shape;171;p29" title="littlepoagy-nobg.png">
             <a:hlinkClick action="ppaction://hlinksldjump" r:id="rId3"/>
           </p:cNvPr>
           <p:cNvPicPr preferRelativeResize="0"/>
@@ -25504,7 +25986,7 @@
       </p:pic>
       <p:pic>
         <p:nvPicPr>
-          <p:cNvPr id="171" name="Google Shape;171;p29">
+          <p:cNvPr id="172" name="Google Shape;172;p29">
             <a:hlinkClick action="ppaction://hlinksldjump" r:id="rId5"/>
           </p:cNvPr>
           <p:cNvPicPr preferRelativeResize="0"/>
@@ -25533,7 +26015,7 @@
       </p:pic>
       <p:pic>
         <p:nvPicPr>
-          <p:cNvPr id="172" name="Google Shape;172;p29" title="littlepoagy-nobg.png"/>
+          <p:cNvPr id="173" name="Google Shape;173;p29" title="littlepoagy-nobg.png"/>
           <p:cNvPicPr preferRelativeResize="0"/>
           <p:nvPr/>
         </p:nvPicPr>
@@ -25560,7 +26042,7 @@
       </p:pic>
       <p:pic>
         <p:nvPicPr>
-          <p:cNvPr id="173" name="Google Shape;173;p29">
+          <p:cNvPr id="174" name="Google Shape;174;p29">
             <a:hlinkClick action="ppaction://hlinksldjump" r:id="rId7"/>
           </p:cNvPr>
           <p:cNvPicPr preferRelativeResize="0"/>
@@ -25590,7 +26072,7 @@
       </p:pic>
       <p:sp>
         <p:nvSpPr>
-          <p:cNvPr id="174" name="Google Shape;174;p29"/>
+          <p:cNvPr id="175" name="Google Shape;175;p29"/>
           <p:cNvSpPr/>
           <p:nvPr/>
         </p:nvSpPr>
@@ -25639,7 +26121,7 @@
       </p:sp>
       <p:sp>
         <p:nvSpPr>
-          <p:cNvPr id="175" name="Google Shape;175;p29"/>
+          <p:cNvPr id="176" name="Google Shape;176;p29"/>
           <p:cNvSpPr txBox="1"/>
           <p:nvPr/>
         </p:nvSpPr>
@@ -25697,7 +26179,7 @@
       </p:sp>
       <p:sp>
         <p:nvSpPr>
-          <p:cNvPr id="176" name="Google Shape;176;p29"/>
+          <p:cNvPr id="177" name="Google Shape;177;p29"/>
           <p:cNvSpPr txBox="1"/>
           <p:nvPr/>
         </p:nvSpPr>
@@ -25819,7 +26301,7 @@
       </p:sp>
       <p:sp>
         <p:nvSpPr>
-          <p:cNvPr id="177" name="Google Shape;177;p29">
+          <p:cNvPr id="178" name="Google Shape;178;p29">
             <a:hlinkClick action="ppaction://hlinksldjump" r:id="rId9"/>
           </p:cNvPr>
           <p:cNvSpPr/>
@@ -25871,7 +26353,7 @@
       </p:sp>
       <p:sp>
         <p:nvSpPr>
-          <p:cNvPr id="178" name="Google Shape;178;p29"/>
+          <p:cNvPr id="179" name="Google Shape;179;p29"/>
           <p:cNvSpPr/>
           <p:nvPr/>
         </p:nvSpPr>
@@ -25929,7 +26411,7 @@
       </p:sp>
       <p:sp>
         <p:nvSpPr>
-          <p:cNvPr id="179" name="Google Shape;179;p29">
+          <p:cNvPr id="180" name="Google Shape;180;p29">
             <a:hlinkClick action="ppaction://hlinksldjump" r:id="rId10"/>
           </p:cNvPr>
           <p:cNvSpPr/>
@@ -25981,7 +26463,7 @@
       </p:sp>
       <p:sp>
         <p:nvSpPr>
-          <p:cNvPr id="180" name="Google Shape;180;p29">
+          <p:cNvPr id="181" name="Google Shape;181;p29">
             <a:hlinkClick action="ppaction://hlinksldjump" r:id="rId11"/>
           </p:cNvPr>
           <p:cNvSpPr/>
@@ -26041,7 +26523,7 @@
       </p:sp>
       <p:sp>
         <p:nvSpPr>
-          <p:cNvPr id="181" name="Google Shape;181;p29">
+          <p:cNvPr id="182" name="Google Shape;182;p29">
             <a:hlinkClick action="ppaction://hlinksldjump" r:id="rId12"/>
           </p:cNvPr>
           <p:cNvSpPr/>
@@ -26101,7 +26583,7 @@
       </p:sp>
       <p:sp>
         <p:nvSpPr>
-          <p:cNvPr id="182" name="Google Shape;182;p29"/>
+          <p:cNvPr id="183" name="Google Shape;183;p29"/>
           <p:cNvSpPr/>
           <p:nvPr/>
         </p:nvSpPr>
@@ -26159,7 +26641,7 @@
       </p:sp>
       <p:sp>
         <p:nvSpPr>
-          <p:cNvPr id="183" name="Google Shape;183;p29"/>
+          <p:cNvPr id="184" name="Google Shape;184;p29"/>
           <p:cNvSpPr/>
           <p:nvPr/>
         </p:nvSpPr>
@@ -26275,7 +26757,7 @@
                                           </p:stCondLst>
                                         </p:cTn>
                                         <p:tgtEl>
-                                          <p:spTgt spid="174"/>
+                                          <p:spTgt spid="175"/>
                                         </p:tgtEl>
                                         <p:attrNameLst>
                                           <p:attrName>style.visibility</p:attrName>
@@ -26289,7 +26771,7 @@
                                       <p:cBhvr>
                                         <p:cTn dur="3000"/>
                                         <p:tgtEl>
-                                          <p:spTgt spid="174"/>
+                                          <p:spTgt spid="175"/>
                                         </p:tgtEl>
                                       </p:cBhvr>
                                     </p:animEffect>
@@ -26319,7 +26801,7 @@
                                           </p:stCondLst>
                                         </p:cTn>
                                         <p:tgtEl>
-                                          <p:spTgt spid="174"/>
+                                          <p:spTgt spid="175"/>
                                         </p:tgtEl>
                                         <p:attrNameLst>
                                           <p:attrName>style.visibility</p:attrName>
@@ -26333,7 +26815,7 @@
                                       <p:cBhvr>
                                         <p:cTn dur="3000"/>
                                         <p:tgtEl>
-                                          <p:spTgt spid="174"/>
+                                          <p:spTgt spid="175"/>
                                         </p:tgtEl>
                                       </p:cBhvr>
                                     </p:animEffect>
@@ -26376,7 +26858,7 @@
   <p:cSld>
     <p:spTree>
       <p:nvGrpSpPr>
-        <p:cNvPr id="187" name="Shape 187"/>
+        <p:cNvPr id="188" name="Shape 188"/>
         <p:cNvGrpSpPr/>
         <p:nvPr/>
       </p:nvGrpSpPr>
@@ -26390,7 +26872,7 @@
       </p:grpSpPr>
       <p:sp>
         <p:nvSpPr>
-          <p:cNvPr id="188" name="Google Shape;188;p30"/>
+          <p:cNvPr id="189" name="Google Shape;189;p30"/>
           <p:cNvSpPr/>
           <p:nvPr/>
         </p:nvSpPr>
@@ -26474,7 +26956,7 @@
       </p:sp>
       <p:pic>
         <p:nvPicPr>
-          <p:cNvPr id="189" name="Google Shape;189;p30">
+          <p:cNvPr id="190" name="Google Shape;190;p30">
             <a:hlinkClick action="ppaction://hlinksldjump" r:id="rId3"/>
           </p:cNvPr>
           <p:cNvPicPr preferRelativeResize="0"/>
@@ -26503,7 +26985,7 @@
       </p:pic>
       <p:pic>
         <p:nvPicPr>
-          <p:cNvPr id="190" name="Google Shape;190;p30" title="littlepoagy-excited-removebg-preview.png"/>
+          <p:cNvPr id="191" name="Google Shape;191;p30" title="littlepoagy-excited-removebg-preview.png"/>
           <p:cNvPicPr preferRelativeResize="0"/>
           <p:nvPr/>
         </p:nvPicPr>
@@ -26531,7 +27013,7 @@
       </p:pic>
       <p:sp>
         <p:nvSpPr>
-          <p:cNvPr id="191" name="Google Shape;191;p30"/>
+          <p:cNvPr id="192" name="Google Shape;192;p30"/>
           <p:cNvSpPr/>
           <p:nvPr/>
         </p:nvSpPr>
@@ -26757,7 +27239,7 @@
       </p:sp>
       <p:sp>
         <p:nvSpPr>
-          <p:cNvPr id="192" name="Google Shape;192;p30">
+          <p:cNvPr id="193" name="Google Shape;193;p30">
             <a:hlinkClick action="ppaction://hlinksldjump" r:id="rId7"/>
           </p:cNvPr>
           <p:cNvSpPr/>
@@ -26824,7 +27306,7 @@
       </p:sp>
       <p:pic>
         <p:nvPicPr>
-          <p:cNvPr id="193" name="Google Shape;193;p30" title="littlepoagy-nobg.png"/>
+          <p:cNvPr id="194" name="Google Shape;194;p30" title="littlepoagy-nobg.png"/>
           <p:cNvPicPr preferRelativeResize="0"/>
           <p:nvPr/>
         </p:nvPicPr>
@@ -26851,7 +27333,7 @@
       </p:pic>
       <p:pic>
         <p:nvPicPr>
-          <p:cNvPr id="194" name="Google Shape;194;p30">
+          <p:cNvPr id="195" name="Google Shape;195;p30">
             <a:hlinkClick action="ppaction://hlinksldjump" r:id="rId9"/>
           </p:cNvPr>
           <p:cNvPicPr preferRelativeResize="0"/>
@@ -26892,7 +27374,7 @@
   <p:cSld>
     <p:spTree>
       <p:nvGrpSpPr>
-        <p:cNvPr id="198" name="Shape 198"/>
+        <p:cNvPr id="199" name="Shape 199"/>
         <p:cNvGrpSpPr/>
         <p:nvPr/>
       </p:nvGrpSpPr>
@@ -26906,7 +27388,7 @@
       </p:grpSpPr>
       <p:sp>
         <p:nvSpPr>
-          <p:cNvPr id="199" name="Google Shape;199;p31"/>
+          <p:cNvPr id="200" name="Google Shape;200;p31"/>
           <p:cNvSpPr/>
           <p:nvPr/>
         </p:nvSpPr>
@@ -26990,7 +27472,7 @@
       </p:sp>
       <p:pic>
         <p:nvPicPr>
-          <p:cNvPr id="200" name="Google Shape;200;p31">
+          <p:cNvPr id="201" name="Google Shape;201;p31">
             <a:hlinkClick action="ppaction://hlinksldjump" r:id="rId3"/>
           </p:cNvPr>
           <p:cNvPicPr preferRelativeResize="0"/>
@@ -27019,7 +27501,7 @@
       </p:pic>
       <p:pic>
         <p:nvPicPr>
-          <p:cNvPr id="201" name="Google Shape;201;p31" title="littlepoagy-excited-removebg-preview.png"/>
+          <p:cNvPr id="202" name="Google Shape;202;p31" title="littlepoagy-excited-removebg-preview.png"/>
           <p:cNvPicPr preferRelativeResize="0"/>
           <p:nvPr/>
         </p:nvPicPr>
@@ -27047,7 +27529,7 @@
       </p:pic>
       <p:sp>
         <p:nvSpPr>
-          <p:cNvPr id="202" name="Google Shape;202;p31"/>
+          <p:cNvPr id="203" name="Google Shape;203;p31"/>
           <p:cNvSpPr/>
           <p:nvPr/>
         </p:nvSpPr>
@@ -27173,7 +27655,7 @@
                 <a:cs typeface="Comic Relief"/>
                 <a:sym typeface="Comic Relief"/>
               </a:rPr>
-              <a:t>20261011.0</a:t>
+              <a:t>20261012.0</a:t>
             </a:r>
             <a:endParaRPr sz="1600">
               <a:solidFill>
@@ -27205,7 +27687,7 @@
                 <a:cs typeface="Comic Relief"/>
                 <a:sym typeface="Comic Relief"/>
               </a:rPr>
-              <a:t>11</a:t>
+              <a:t>12</a:t>
             </a:r>
             <a:r>
               <a:rPr lang="en" sz="1200">
@@ -27272,7 +27754,7 @@
                 <a:cs typeface="Comic Relief"/>
                 <a:sym typeface="Comic Relief"/>
               </a:rPr>
-              <a:t>Adds music player</a:t>
+              <a:t>Continues working on poagy pantry defense</a:t>
             </a:r>
             <a:endParaRPr sz="1000">
               <a:solidFill>
@@ -27304,7 +27786,7 @@
                 <a:cs typeface="Comic Relief"/>
                 <a:sym typeface="Comic Relief"/>
               </a:rPr>
-              <a:t>Continues working on poagy pantry defense</a:t>
+              <a:t>Fixes some “unique” UI issues</a:t>
             </a:r>
             <a:endParaRPr sz="1000">
               <a:solidFill>
@@ -27359,7 +27841,7 @@
                 <a:cs typeface="Comic Relief"/>
                 <a:sym typeface="Comic Relief"/>
               </a:rPr>
-              <a:t>Previous update (20261007.1):</a:t>
+              <a:t>Previous update (20261011.0):</a:t>
             </a:r>
             <a:endParaRPr sz="1000">
               <a:solidFill>
@@ -27396,7 +27878,7 @@
                 <a:cs typeface="Comic Relief"/>
                 <a:sym typeface="Comic Relief"/>
               </a:rPr>
-              <a:t>Small bug fixes</a:t>
+              <a:t>Adds music player</a:t>
             </a:r>
             <a:endParaRPr sz="1000">
               <a:solidFill>
@@ -27433,7 +27915,7 @@
                 <a:cs typeface="Comic Relief"/>
                 <a:sym typeface="Comic Relief"/>
               </a:rPr>
-              <a:t>Adds per-game news and badges.</a:t>
+              <a:t>Continues working on poagy pantry defense</a:t>
             </a:r>
             <a:endParaRPr sz="1000">
               <a:solidFill>
@@ -27472,7 +27954,7 @@
       </p:sp>
       <p:sp>
         <p:nvSpPr>
-          <p:cNvPr id="203" name="Google Shape;203;p31">
+          <p:cNvPr id="204" name="Google Shape;204;p31">
             <a:hlinkClick action="ppaction://hlinksldjump" r:id="rId6"/>
           </p:cNvPr>
           <p:cNvSpPr/>
@@ -27539,7 +28021,7 @@
       </p:sp>
       <p:sp>
         <p:nvSpPr>
-          <p:cNvPr id="204" name="Google Shape;204;p31"/>
+          <p:cNvPr id="205" name="Google Shape;205;p31"/>
           <p:cNvSpPr/>
           <p:nvPr/>
         </p:nvSpPr>
@@ -27597,7 +28079,7 @@
       </p:sp>
       <p:sp>
         <p:nvSpPr>
-          <p:cNvPr id="205" name="Google Shape;205;p31">
+          <p:cNvPr id="206" name="Google Shape;206;p31">
             <a:hlinkClick action="ppaction://hlinksldjump" r:id="rId7"/>
           </p:cNvPr>
           <p:cNvSpPr/>
@@ -27657,7 +28139,7 @@
       </p:sp>
       <p:pic>
         <p:nvPicPr>
-          <p:cNvPr id="206" name="Google Shape;206;p31" title="littlepoagy-nobg.png"/>
+          <p:cNvPr id="207" name="Google Shape;207;p31" title="littlepoagy-nobg.png"/>
           <p:cNvPicPr preferRelativeResize="0"/>
           <p:nvPr/>
         </p:nvPicPr>
@@ -27684,7 +28166,7 @@
       </p:pic>
       <p:pic>
         <p:nvPicPr>
-          <p:cNvPr id="207" name="Google Shape;207;p31">
+          <p:cNvPr id="208" name="Google Shape;208;p31">
             <a:hlinkClick action="ppaction://hlinksldjump" r:id="rId9"/>
           </p:cNvPr>
           <p:cNvPicPr preferRelativeResize="0"/>
@@ -27725,7 +28207,7 @@
   <p:cSld>
     <p:spTree>
       <p:nvGrpSpPr>
-        <p:cNvPr id="211" name="Shape 211"/>
+        <p:cNvPr id="212" name="Shape 212"/>
         <p:cNvGrpSpPr/>
         <p:nvPr/>
       </p:nvGrpSpPr>
@@ -27739,7 +28221,7 @@
       </p:grpSpPr>
       <p:sp>
         <p:nvSpPr>
-          <p:cNvPr id="212" name="Google Shape;212;p32"/>
+          <p:cNvPr id="213" name="Google Shape;213;p32"/>
           <p:cNvSpPr/>
           <p:nvPr/>
         </p:nvSpPr>
@@ -27823,7 +28305,7 @@
       </p:sp>
       <p:pic>
         <p:nvPicPr>
-          <p:cNvPr id="213" name="Google Shape;213;p32">
+          <p:cNvPr id="214" name="Google Shape;214;p32">
             <a:hlinkClick action="ppaction://hlinksldjump" r:id="rId3"/>
           </p:cNvPr>
           <p:cNvPicPr preferRelativeResize="0"/>
@@ -27852,7 +28334,7 @@
       </p:pic>
       <p:pic>
         <p:nvPicPr>
-          <p:cNvPr id="214" name="Google Shape;214;p32" title="littlepoagy-excited-removebg-preview.png"/>
+          <p:cNvPr id="215" name="Google Shape;215;p32" title="littlepoagy-excited-removebg-preview.png"/>
           <p:cNvPicPr preferRelativeResize="0"/>
           <p:nvPr/>
         </p:nvPicPr>
@@ -27880,7 +28362,7 @@
       </p:pic>
       <p:sp>
         <p:nvSpPr>
-          <p:cNvPr id="215" name="Google Shape;215;p32"/>
+          <p:cNvPr id="216" name="Google Shape;216;p32"/>
           <p:cNvSpPr/>
           <p:nvPr/>
         </p:nvSpPr>
@@ -28091,7 +28573,7 @@
       </p:sp>
       <p:sp>
         <p:nvSpPr>
-          <p:cNvPr id="216" name="Google Shape;216;p32">
+          <p:cNvPr id="217" name="Google Shape;217;p32">
             <a:hlinkClick action="ppaction://hlinksldjump" r:id="rId6"/>
           </p:cNvPr>
           <p:cNvSpPr/>
@@ -28158,7 +28640,7 @@
       </p:sp>
       <p:sp>
         <p:nvSpPr>
-          <p:cNvPr id="217" name="Google Shape;217;p32">
+          <p:cNvPr id="218" name="Google Shape;218;p32">
             <a:hlinkClick action="ppaction://hlinksldjump" r:id="rId7"/>
           </p:cNvPr>
           <p:cNvSpPr/>
@@ -28218,7 +28700,7 @@
       </p:sp>
       <p:sp>
         <p:nvSpPr>
-          <p:cNvPr id="218" name="Google Shape;218;p32"/>
+          <p:cNvPr id="219" name="Google Shape;219;p32"/>
           <p:cNvSpPr/>
           <p:nvPr/>
         </p:nvSpPr>
@@ -28276,7 +28758,7 @@
       </p:sp>
       <p:pic>
         <p:nvPicPr>
-          <p:cNvPr id="219" name="Google Shape;219;p32" title="littlepoagy-nobg.png"/>
+          <p:cNvPr id="220" name="Google Shape;220;p32" title="littlepoagy-nobg.png"/>
           <p:cNvPicPr preferRelativeResize="0"/>
           <p:nvPr/>
         </p:nvPicPr>
@@ -28303,7 +28785,7 @@
       </p:pic>
       <p:pic>
         <p:nvPicPr>
-          <p:cNvPr id="220" name="Google Shape;220;p32">
+          <p:cNvPr id="221" name="Google Shape;221;p32">
             <a:hlinkClick action="ppaction://hlinksldjump" r:id="rId9"/>
           </p:cNvPr>
           <p:cNvPicPr preferRelativeResize="0"/>
@@ -28344,7 +28826,7 @@
   <p:cSld>
     <p:spTree>
       <p:nvGrpSpPr>
-        <p:cNvPr id="224" name="Shape 224"/>
+        <p:cNvPr id="225" name="Shape 225"/>
         <p:cNvGrpSpPr/>
         <p:nvPr/>
       </p:nvGrpSpPr>
@@ -28358,7 +28840,7 @@
       </p:grpSpPr>
       <p:sp>
         <p:nvSpPr>
-          <p:cNvPr id="225" name="Google Shape;225;p33"/>
+          <p:cNvPr id="226" name="Google Shape;226;p33"/>
           <p:cNvSpPr/>
           <p:nvPr/>
         </p:nvSpPr>
@@ -28442,7 +28924,7 @@
       </p:sp>
       <p:pic>
         <p:nvPicPr>
-          <p:cNvPr id="226" name="Google Shape;226;p33"/>
+          <p:cNvPr id="227" name="Google Shape;227;p33"/>
           <p:cNvPicPr preferRelativeResize="0"/>
           <p:nvPr/>
         </p:nvPicPr>
@@ -28469,7 +28951,7 @@
       </p:pic>
       <p:pic>
         <p:nvPicPr>
-          <p:cNvPr id="227" name="Google Shape;227;p33" title="littlepoagy-excited-removebg-preview.png"/>
+          <p:cNvPr id="228" name="Google Shape;228;p33" title="littlepoagy-excited-removebg-preview.png"/>
           <p:cNvPicPr preferRelativeResize="0"/>
           <p:nvPr/>
         </p:nvPicPr>
@@ -28497,7 +28979,7 @@
       </p:pic>
       <p:sp>
         <p:nvSpPr>
-          <p:cNvPr id="228" name="Google Shape;228;p33"/>
+          <p:cNvPr id="229" name="Google Shape;229;p33"/>
           <p:cNvSpPr/>
           <p:nvPr/>
         </p:nvSpPr>
@@ -28637,7 +29119,7 @@
       </p:sp>
       <p:pic>
         <p:nvPicPr>
-          <p:cNvPr id="229" name="Google Shape;229;p33" title="littlepoagy-cool-removebg-preview.png">
+          <p:cNvPr id="230" name="Google Shape;230;p33" title="littlepoagy-cool-removebg-preview.png">
             <a:hlinkClick action="ppaction://hlinksldjump" r:id="rId5"/>
           </p:cNvPr>
           <p:cNvPicPr preferRelativeResize="0"/>
@@ -28666,7 +29148,7 @@
       </p:pic>
       <p:sp>
         <p:nvSpPr>
-          <p:cNvPr id="230" name="Google Shape;230;p33">
+          <p:cNvPr id="231" name="Google Shape;231;p33">
             <a:hlinkClick r:id="rId7"/>
           </p:cNvPr>
           <p:cNvSpPr/>
@@ -28728,7 +29210,7 @@
       </p:sp>
       <p:sp>
         <p:nvSpPr>
-          <p:cNvPr id="231" name="Google Shape;231;p33">
+          <p:cNvPr id="232" name="Google Shape;232;p33">
             <a:hlinkClick r:id="rId8"/>
           </p:cNvPr>
           <p:cNvSpPr/>
@@ -28790,7 +29272,7 @@
       </p:sp>
       <p:sp>
         <p:nvSpPr>
-          <p:cNvPr id="232" name="Google Shape;232;p33">
+          <p:cNvPr id="233" name="Google Shape;233;p33">
             <a:hlinkClick r:id="rId9"/>
           </p:cNvPr>
           <p:cNvSpPr/>
@@ -28852,7 +29334,7 @@
       </p:sp>
       <p:sp>
         <p:nvSpPr>
-          <p:cNvPr id="233" name="Google Shape;233;p33"/>
+          <p:cNvPr id="234" name="Google Shape;234;p33"/>
           <p:cNvSpPr/>
           <p:nvPr/>
         </p:nvSpPr>
@@ -28912,7 +29394,7 @@
       </p:sp>
       <p:pic>
         <p:nvPicPr>
-          <p:cNvPr id="234" name="Google Shape;234;p33" title="littlepoagy-cool-removebg-preview.png"/>
+          <p:cNvPr id="235" name="Google Shape;235;p33" title="littlepoagy-cool-removebg-preview.png"/>
           <p:cNvPicPr preferRelativeResize="0"/>
           <p:nvPr/>
         </p:nvPicPr>
@@ -28940,7 +29422,7 @@
       </p:pic>
       <p:pic>
         <p:nvPicPr>
-          <p:cNvPr id="235" name="Google Shape;235;p33" title="littlepoagy-confused-removebg-preview.png"/>
+          <p:cNvPr id="236" name="Google Shape;236;p33" title="littlepoagy-confused-removebg-preview.png"/>
           <p:cNvPicPr preferRelativeResize="0"/>
           <p:nvPr/>
         </p:nvPicPr>
@@ -28968,7 +29450,7 @@
       </p:pic>
       <p:pic>
         <p:nvPicPr>
-          <p:cNvPr id="236" name="Google Shape;236;p33" title="littlepoagy-happy-removebg-preview.png"/>
+          <p:cNvPr id="237" name="Google Shape;237;p33" title="littlepoagy-happy-removebg-preview.png"/>
           <p:cNvPicPr preferRelativeResize="0"/>
           <p:nvPr/>
         </p:nvPicPr>
@@ -28996,7 +29478,7 @@
       </p:pic>
       <p:sp>
         <p:nvSpPr>
-          <p:cNvPr id="237" name="Google Shape;237;p33"/>
+          <p:cNvPr id="238" name="Google Shape;238;p33"/>
           <p:cNvSpPr txBox="1"/>
           <p:nvPr/>
         </p:nvSpPr>
@@ -29034,7 +29516,7 @@
                   <a:schemeClr val="lt1"/>
                 </a:solidFill>
               </a:rPr>
-              <a:t>20261011.0-</a:t>
+              <a:t>20261012.0-</a:t>
             </a:r>
             <a:r>
               <a:rPr lang="en" sz="600">
@@ -29054,7 +29536,7 @@
       </p:sp>
       <p:sp>
         <p:nvSpPr>
-          <p:cNvPr id="238" name="Google Shape;238;p33"/>
+          <p:cNvPr id="239" name="Google Shape;239;p33"/>
           <p:cNvSpPr txBox="1"/>
           <p:nvPr/>
         </p:nvSpPr>
@@ -29112,7 +29594,7 @@
       </p:sp>
       <p:pic>
         <p:nvPicPr>
-          <p:cNvPr id="239" name="Google Shape;239;p33">
+          <p:cNvPr id="240" name="Google Shape;240;p33">
             <a:hlinkClick action="ppaction://hlinksldjump" r:id="rId12"/>
           </p:cNvPr>
           <p:cNvPicPr preferRelativeResize="0"/>
@@ -29142,7 +29624,7 @@
       </p:pic>
       <p:pic>
         <p:nvPicPr>
-          <p:cNvPr id="240" name="Google Shape;240;p33">
+          <p:cNvPr id="241" name="Google Shape;241;p33">
             <a:hlinkClick action="ppaction://hlinksldjump" r:id="rId14"/>
           </p:cNvPr>
           <p:cNvPicPr preferRelativeResize="0"/>
@@ -29458,6 +29940,285 @@
 </file>
 
 <file path=ppt/theme/theme2.xml><?xml version="1.0" encoding="utf-8"?>
+<a:theme xmlns:a="http://schemas.openxmlformats.org/drawingml/2006/main" xmlns:r="http://schemas.openxmlformats.org/officeDocument/2006/relationships" name="Simple Light">
+  <a:themeElements>
+    <a:clrScheme name="Simple Light">
+      <a:dk1>
+        <a:srgbClr val="000000"/>
+      </a:dk1>
+      <a:lt1>
+        <a:srgbClr val="FFFFFF"/>
+      </a:lt1>
+      <a:dk2>
+        <a:srgbClr val="595959"/>
+      </a:dk2>
+      <a:lt2>
+        <a:srgbClr val="EEEEEE"/>
+      </a:lt2>
+      <a:accent1>
+        <a:srgbClr val="4285F4"/>
+      </a:accent1>
+      <a:accent2>
+        <a:srgbClr val="212121"/>
+      </a:accent2>
+      <a:accent3>
+        <a:srgbClr val="78909C"/>
+      </a:accent3>
+      <a:accent4>
+        <a:srgbClr val="FFAB40"/>
+      </a:accent4>
+      <a:accent5>
+        <a:srgbClr val="0097A7"/>
+      </a:accent5>
+      <a:accent6>
+        <a:srgbClr val="EEFF41"/>
+      </a:accent6>
+      <a:hlink>
+        <a:srgbClr val="0097A7"/>
+      </a:hlink>
+      <a:folHlink>
+        <a:srgbClr val="0097A7"/>
+      </a:folHlink>
+    </a:clrScheme>
+    <a:fontScheme name="Office">
+      <a:majorFont>
+        <a:latin typeface="Arial"/>
+        <a:ea typeface=""/>
+        <a:cs typeface=""/>
+        <a:font script="Jpan" typeface="ＭＳ Ｐゴシック"/>
+        <a:font script="Hang" typeface="맑은 고딕"/>
+        <a:font script="Hans" typeface="宋体"/>
+        <a:font script="Hant" typeface="新細明體"/>
+        <a:font script="Arab" typeface="Times New Roman"/>
+        <a:font script="Hebr" typeface="Times New Roman"/>
+        <a:font script="Thai" typeface="Angsana New"/>
+        <a:font script="Ethi" typeface="Nyala"/>
+        <a:font script="Beng" typeface="Vrinda"/>
+        <a:font script="Gujr" typeface="Shruti"/>
+        <a:font script="Khmr" typeface="MoolBoran"/>
+        <a:font script="Knda" typeface="Tunga"/>
+        <a:font script="Guru" typeface="Raavi"/>
+        <a:font script="Cans" typeface="Euphemia"/>
+        <a:font script="Cher" typeface="Plantagenet Cherokee"/>
+        <a:font script="Yiii" typeface="Microsoft Yi Baiti"/>
+        <a:font script="Tibt" typeface="Microsoft Himalaya"/>
+        <a:font script="Thaa" typeface="MV Boli"/>
+        <a:font script="Deva" typeface="Mangal"/>
+        <a:font script="Telu" typeface="Gautami"/>
+        <a:font script="Taml" typeface="Latha"/>
+        <a:font script="Syrc" typeface="Estrangelo Edessa"/>
+        <a:font script="Orya" typeface="Kalinga"/>
+        <a:font script="Mlym" typeface="Kartika"/>
+        <a:font script="Laoo" typeface="DokChampa"/>
+        <a:font script="Sinh" typeface="Iskoola Pota"/>
+        <a:font script="Mong" typeface="Mongolian Baiti"/>
+        <a:font script="Viet" typeface="Times New Roman"/>
+        <a:font script="Uigh" typeface="Microsoft Uighur"/>
+        <a:font script="Geor" typeface="Sylfaen"/>
+      </a:majorFont>
+      <a:minorFont>
+        <a:latin typeface="Arial"/>
+        <a:ea typeface=""/>
+        <a:cs typeface=""/>
+        <a:font script="Jpan" typeface="ＭＳ Ｐゴシック"/>
+        <a:font script="Hang" typeface="맑은 고딕"/>
+        <a:font script="Hans" typeface="宋体"/>
+        <a:font script="Hant" typeface="新細明體"/>
+        <a:font script="Arab" typeface="Arial"/>
+        <a:font script="Hebr" typeface="Arial"/>
+        <a:font script="Thai" typeface="Cordia New"/>
+        <a:font script="Ethi" typeface="Nyala"/>
+        <a:font script="Beng" typeface="Vrinda"/>
+        <a:font script="Gujr" typeface="Shruti"/>
+        <a:font script="Khmr" typeface="DaunPenh"/>
+        <a:font script="Knda" typeface="Tunga"/>
+        <a:font script="Guru" typeface="Raavi"/>
+        <a:font script="Cans" typeface="Euphemia"/>
+        <a:font script="Cher" typeface="Plantagenet Cherokee"/>
+        <a:font script="Yiii" typeface="Microsoft Yi Baiti"/>
+        <a:font script="Tibt" typeface="Microsoft Himalaya"/>
+        <a:font script="Thaa" typeface="MV Boli"/>
+        <a:font script="Deva" typeface="Mangal"/>
+        <a:font script="Telu" typeface="Gautami"/>
+        <a:font script="Taml" typeface="Latha"/>
+        <a:font script="Syrc" typeface="Estrangelo Edessa"/>
+        <a:font script="Orya" typeface="Kalinga"/>
+        <a:font script="Mlym" typeface="Kartika"/>
+        <a:font script="Laoo" typeface="DokChampa"/>
+        <a:font script="Sinh" typeface="Iskoola Pota"/>
+        <a:font script="Mong" typeface="Mongolian Baiti"/>
+        <a:font script="Viet" typeface="Arial"/>
+        <a:font script="Uigh" typeface="Microsoft Uighur"/>
+        <a:font script="Geor" typeface="Sylfaen"/>
+      </a:minorFont>
+    </a:fontScheme>
+    <a:fmtScheme name="Office">
+      <a:fillStyleLst>
+        <a:solidFill>
+          <a:schemeClr val="phClr"/>
+        </a:solidFill>
+        <a:gradFill rotWithShape="1">
+          <a:gsLst>
+            <a:gs pos="0">
+              <a:schemeClr val="phClr">
+                <a:tint val="50000"/>
+                <a:satMod val="300000"/>
+              </a:schemeClr>
+            </a:gs>
+            <a:gs pos="35000">
+              <a:schemeClr val="phClr">
+                <a:tint val="37000"/>
+                <a:satMod val="300000"/>
+              </a:schemeClr>
+            </a:gs>
+            <a:gs pos="100000">
+              <a:schemeClr val="phClr">
+                <a:tint val="15000"/>
+                <a:satMod val="350000"/>
+              </a:schemeClr>
+            </a:gs>
+          </a:gsLst>
+          <a:lin ang="16200000" scaled="1"/>
+        </a:gradFill>
+        <a:gradFill rotWithShape="1">
+          <a:gsLst>
+            <a:gs pos="0">
+              <a:schemeClr val="phClr">
+                <a:tint val="100000"/>
+                <a:shade val="100000"/>
+                <a:satMod val="130000"/>
+              </a:schemeClr>
+            </a:gs>
+            <a:gs pos="100000">
+              <a:schemeClr val="phClr">
+                <a:tint val="50000"/>
+                <a:shade val="100000"/>
+                <a:satMod val="350000"/>
+              </a:schemeClr>
+            </a:gs>
+          </a:gsLst>
+          <a:lin ang="16200000" scaled="0"/>
+        </a:gradFill>
+      </a:fillStyleLst>
+      <a:lnStyleLst>
+        <a:ln w="9525" cap="flat" cmpd="sng" algn="ctr">
+          <a:solidFill>
+            <a:schemeClr val="phClr">
+              <a:shade val="95000"/>
+              <a:satMod val="105000"/>
+            </a:schemeClr>
+          </a:solidFill>
+          <a:prstDash val="solid"/>
+        </a:ln>
+        <a:ln w="25400" cap="flat" cmpd="sng" algn="ctr">
+          <a:solidFill>
+            <a:schemeClr val="phClr"/>
+          </a:solidFill>
+          <a:prstDash val="solid"/>
+        </a:ln>
+        <a:ln w="38100" cap="flat" cmpd="sng" algn="ctr">
+          <a:solidFill>
+            <a:schemeClr val="phClr"/>
+          </a:solidFill>
+          <a:prstDash val="solid"/>
+        </a:ln>
+      </a:lnStyleLst>
+      <a:effectStyleLst>
+        <a:effectStyle>
+          <a:effectLst>
+            <a:outerShdw blurRad="40000" dist="20000" dir="5400000" rotWithShape="0">
+              <a:srgbClr val="000000">
+                <a:alpha val="38000"/>
+              </a:srgbClr>
+            </a:outerShdw>
+          </a:effectLst>
+        </a:effectStyle>
+        <a:effectStyle>
+          <a:effectLst>
+            <a:outerShdw blurRad="40000" dist="23000" dir="5400000" rotWithShape="0">
+              <a:srgbClr val="000000">
+                <a:alpha val="35000"/>
+              </a:srgbClr>
+            </a:outerShdw>
+          </a:effectLst>
+        </a:effectStyle>
+        <a:effectStyle>
+          <a:effectLst>
+            <a:outerShdw blurRad="40000" dist="23000" dir="5400000" rotWithShape="0">
+              <a:srgbClr val="000000">
+                <a:alpha val="35000"/>
+              </a:srgbClr>
+            </a:outerShdw>
+          </a:effectLst>
+          <a:scene3d>
+            <a:camera prst="orthographicFront">
+              <a:rot lat="0" lon="0" rev="0"/>
+            </a:camera>
+            <a:lightRig rig="threePt" dir="t">
+              <a:rot lat="0" lon="0" rev="1200000"/>
+            </a:lightRig>
+          </a:scene3d>
+          <a:sp3d>
+            <a:bevelT w="63500" h="25400"/>
+          </a:sp3d>
+        </a:effectStyle>
+      </a:effectStyleLst>
+      <a:bgFillStyleLst>
+        <a:solidFill>
+          <a:schemeClr val="phClr"/>
+        </a:solidFill>
+        <a:gradFill rotWithShape="1">
+          <a:gsLst>
+            <a:gs pos="0">
+              <a:schemeClr val="phClr">
+                <a:tint val="40000"/>
+                <a:satMod val="350000"/>
+              </a:schemeClr>
+            </a:gs>
+            <a:gs pos="40000">
+              <a:schemeClr val="phClr">
+                <a:tint val="45000"/>
+                <a:shade val="99000"/>
+                <a:satMod val="350000"/>
+              </a:schemeClr>
+            </a:gs>
+            <a:gs pos="100000">
+              <a:schemeClr val="phClr">
+                <a:shade val="20000"/>
+                <a:satMod val="255000"/>
+              </a:schemeClr>
+            </a:gs>
+          </a:gsLst>
+          <a:path path="circle">
+            <a:fillToRect l="50000" t="-80000" r="50000" b="180000"/>
+          </a:path>
+        </a:gradFill>
+        <a:gradFill rotWithShape="1">
+          <a:gsLst>
+            <a:gs pos="0">
+              <a:schemeClr val="phClr">
+                <a:tint val="80000"/>
+                <a:satMod val="300000"/>
+              </a:schemeClr>
+            </a:gs>
+            <a:gs pos="100000">
+              <a:schemeClr val="phClr">
+                <a:shade val="30000"/>
+                <a:satMod val="200000"/>
+              </a:schemeClr>
+            </a:gs>
+          </a:gsLst>
+          <a:path path="circle">
+            <a:fillToRect l="50000" t="50000" r="50000" b="50000"/>
+          </a:path>
+        </a:gradFill>
+      </a:bgFillStyleLst>
+    </a:fmtScheme>
+  </a:themeElements>
+</a:theme>
+</file>
+
+<file path=ppt/theme/theme3.xml><?xml version="1.0" encoding="utf-8"?>
 <a:theme xmlns:a="http://schemas.openxmlformats.org/drawingml/2006/main" xmlns:r="http://schemas.openxmlformats.org/officeDocument/2006/relationships">
   <a:themeElements>
     <a:clrScheme name="Default">
@@ -29734,283 +30495,4 @@
     </a:fmtScheme>
   </a:themeElements>
 </a:theme>
-</file>
-
-<file path=ppt/theme/theme3.xml><?xml version="1.0" encoding="utf-8"?>
-<a:theme xmlns:a="http://schemas.openxmlformats.org/drawingml/2006/main" xmlns:r="http://schemas.openxmlformats.org/officeDocument/2006/relationships" name="Simple Light">
-  <a:themeElements>
-    <a:clrScheme name="Simple Light">
-      <a:dk1>
-        <a:srgbClr val="000000"/>
-      </a:dk1>
-      <a:lt1>
-        <a:srgbClr val="FFFFFF"/>
-      </a:lt1>
-      <a:dk2>
-        <a:srgbClr val="595959"/>
-      </a:dk2>
-      <a:lt2>
-        <a:srgbClr val="EEEEEE"/>
-      </a:lt2>
-      <a:accent1>
-        <a:srgbClr val="4285F4"/>
-      </a:accent1>
-      <a:accent2>
-        <a:srgbClr val="212121"/>
-      </a:accent2>
-      <a:accent3>
-        <a:srgbClr val="78909C"/>
-      </a:accent3>
-      <a:accent4>
-        <a:srgbClr val="FFAB40"/>
-      </a:accent4>
-      <a:accent5>
-        <a:srgbClr val="0097A7"/>
-      </a:accent5>
-      <a:accent6>
-        <a:srgbClr val="EEFF41"/>
-      </a:accent6>
-      <a:hlink>
-        <a:srgbClr val="0097A7"/>
-      </a:hlink>
-      <a:folHlink>
-        <a:srgbClr val="0097A7"/>
-      </a:folHlink>
-    </a:clrScheme>
-    <a:fontScheme name="Office">
-      <a:majorFont>
-        <a:latin typeface="Arial"/>
-        <a:ea typeface=""/>
-        <a:cs typeface=""/>
-        <a:font script="Jpan" typeface="ＭＳ Ｐゴシック"/>
-        <a:font script="Hang" typeface="맑은 고딕"/>
-        <a:font script="Hans" typeface="宋体"/>
-        <a:font script="Hant" typeface="新細明體"/>
-        <a:font script="Arab" typeface="Times New Roman"/>
-        <a:font script="Hebr" typeface="Times New Roman"/>
-        <a:font script="Thai" typeface="Angsana New"/>
-        <a:font script="Ethi" typeface="Nyala"/>
-        <a:font script="Beng" typeface="Vrinda"/>
-        <a:font script="Gujr" typeface="Shruti"/>
-        <a:font script="Khmr" typeface="MoolBoran"/>
-        <a:font script="Knda" typeface="Tunga"/>
-        <a:font script="Guru" typeface="Raavi"/>
-        <a:font script="Cans" typeface="Euphemia"/>
-        <a:font script="Cher" typeface="Plantagenet Cherokee"/>
-        <a:font script="Yiii" typeface="Microsoft Yi Baiti"/>
-        <a:font script="Tibt" typeface="Microsoft Himalaya"/>
-        <a:font script="Thaa" typeface="MV Boli"/>
-        <a:font script="Deva" typeface="Mangal"/>
-        <a:font script="Telu" typeface="Gautami"/>
-        <a:font script="Taml" typeface="Latha"/>
-        <a:font script="Syrc" typeface="Estrangelo Edessa"/>
-        <a:font script="Orya" typeface="Kalinga"/>
-        <a:font script="Mlym" typeface="Kartika"/>
-        <a:font script="Laoo" typeface="DokChampa"/>
-        <a:font script="Sinh" typeface="Iskoola Pota"/>
-        <a:font script="Mong" typeface="Mongolian Baiti"/>
-        <a:font script="Viet" typeface="Times New Roman"/>
-        <a:font script="Uigh" typeface="Microsoft Uighur"/>
-        <a:font script="Geor" typeface="Sylfaen"/>
-      </a:majorFont>
-      <a:minorFont>
-        <a:latin typeface="Arial"/>
-        <a:ea typeface=""/>
-        <a:cs typeface=""/>
-        <a:font script="Jpan" typeface="ＭＳ Ｐゴシック"/>
-        <a:font script="Hang" typeface="맑은 고딕"/>
-        <a:font script="Hans" typeface="宋体"/>
-        <a:font script="Hant" typeface="新細明體"/>
-        <a:font script="Arab" typeface="Arial"/>
-        <a:font script="Hebr" typeface="Arial"/>
-        <a:font script="Thai" typeface="Cordia New"/>
-        <a:font script="Ethi" typeface="Nyala"/>
-        <a:font script="Beng" typeface="Vrinda"/>
-        <a:font script="Gujr" typeface="Shruti"/>
-        <a:font script="Khmr" typeface="DaunPenh"/>
-        <a:font script="Knda" typeface="Tunga"/>
-        <a:font script="Guru" typeface="Raavi"/>
-        <a:font script="Cans" typeface="Euphemia"/>
-        <a:font script="Cher" typeface="Plantagenet Cherokee"/>
-        <a:font script="Yiii" typeface="Microsoft Yi Baiti"/>
-        <a:font script="Tibt" typeface="Microsoft Himalaya"/>
-        <a:font script="Thaa" typeface="MV Boli"/>
-        <a:font script="Deva" typeface="Mangal"/>
-        <a:font script="Telu" typeface="Gautami"/>
-        <a:font script="Taml" typeface="Latha"/>
-        <a:font script="Syrc" typeface="Estrangelo Edessa"/>
-        <a:font script="Orya" typeface="Kalinga"/>
-        <a:font script="Mlym" typeface="Kartika"/>
-        <a:font script="Laoo" typeface="DokChampa"/>
-        <a:font script="Sinh" typeface="Iskoola Pota"/>
-        <a:font script="Mong" typeface="Mongolian Baiti"/>
-        <a:font script="Viet" typeface="Arial"/>
-        <a:font script="Uigh" typeface="Microsoft Uighur"/>
-        <a:font script="Geor" typeface="Sylfaen"/>
-      </a:minorFont>
-    </a:fontScheme>
-    <a:fmtScheme name="Office">
-      <a:fillStyleLst>
-        <a:solidFill>
-          <a:schemeClr val="phClr"/>
-        </a:solidFill>
-        <a:gradFill rotWithShape="1">
-          <a:gsLst>
-            <a:gs pos="0">
-              <a:schemeClr val="phClr">
-                <a:tint val="50000"/>
-                <a:satMod val="300000"/>
-              </a:schemeClr>
-            </a:gs>
-            <a:gs pos="35000">
-              <a:schemeClr val="phClr">
-                <a:tint val="37000"/>
-                <a:satMod val="300000"/>
-              </a:schemeClr>
-            </a:gs>
-            <a:gs pos="100000">
-              <a:schemeClr val="phClr">
-                <a:tint val="15000"/>
-                <a:satMod val="350000"/>
-              </a:schemeClr>
-            </a:gs>
-          </a:gsLst>
-          <a:lin ang="16200000" scaled="1"/>
-        </a:gradFill>
-        <a:gradFill rotWithShape="1">
-          <a:gsLst>
-            <a:gs pos="0">
-              <a:schemeClr val="phClr">
-                <a:tint val="100000"/>
-                <a:shade val="100000"/>
-                <a:satMod val="130000"/>
-              </a:schemeClr>
-            </a:gs>
-            <a:gs pos="100000">
-              <a:schemeClr val="phClr">
-                <a:tint val="50000"/>
-                <a:shade val="100000"/>
-                <a:satMod val="350000"/>
-              </a:schemeClr>
-            </a:gs>
-          </a:gsLst>
-          <a:lin ang="16200000" scaled="0"/>
-        </a:gradFill>
-      </a:fillStyleLst>
-      <a:lnStyleLst>
-        <a:ln w="9525" cap="flat" cmpd="sng" algn="ctr">
-          <a:solidFill>
-            <a:schemeClr val="phClr">
-              <a:shade val="95000"/>
-              <a:satMod val="105000"/>
-            </a:schemeClr>
-          </a:solidFill>
-          <a:prstDash val="solid"/>
-        </a:ln>
-        <a:ln w="25400" cap="flat" cmpd="sng" algn="ctr">
-          <a:solidFill>
-            <a:schemeClr val="phClr"/>
-          </a:solidFill>
-          <a:prstDash val="solid"/>
-        </a:ln>
-        <a:ln w="38100" cap="flat" cmpd="sng" algn="ctr">
-          <a:solidFill>
-            <a:schemeClr val="phClr"/>
-          </a:solidFill>
-          <a:prstDash val="solid"/>
-        </a:ln>
-      </a:lnStyleLst>
-      <a:effectStyleLst>
-        <a:effectStyle>
-          <a:effectLst>
-            <a:outerShdw blurRad="40000" dist="20000" dir="5400000" rotWithShape="0">
-              <a:srgbClr val="000000">
-                <a:alpha val="38000"/>
-              </a:srgbClr>
-            </a:outerShdw>
-          </a:effectLst>
-        </a:effectStyle>
-        <a:effectStyle>
-          <a:effectLst>
-            <a:outerShdw blurRad="40000" dist="23000" dir="5400000" rotWithShape="0">
-              <a:srgbClr val="000000">
-                <a:alpha val="35000"/>
-              </a:srgbClr>
-            </a:outerShdw>
-          </a:effectLst>
-        </a:effectStyle>
-        <a:effectStyle>
-          <a:effectLst>
-            <a:outerShdw blurRad="40000" dist="23000" dir="5400000" rotWithShape="0">
-              <a:srgbClr val="000000">
-                <a:alpha val="35000"/>
-              </a:srgbClr>
-            </a:outerShdw>
-          </a:effectLst>
-          <a:scene3d>
-            <a:camera prst="orthographicFront">
-              <a:rot lat="0" lon="0" rev="0"/>
-            </a:camera>
-            <a:lightRig rig="threePt" dir="t">
-              <a:rot lat="0" lon="0" rev="1200000"/>
-            </a:lightRig>
-          </a:scene3d>
-          <a:sp3d>
-            <a:bevelT w="63500" h="25400"/>
-          </a:sp3d>
-        </a:effectStyle>
-      </a:effectStyleLst>
-      <a:bgFillStyleLst>
-        <a:solidFill>
-          <a:schemeClr val="phClr"/>
-        </a:solidFill>
-        <a:gradFill rotWithShape="1">
-          <a:gsLst>
-            <a:gs pos="0">
-              <a:schemeClr val="phClr">
-                <a:tint val="40000"/>
-                <a:satMod val="350000"/>
-              </a:schemeClr>
-            </a:gs>
-            <a:gs pos="40000">
-              <a:schemeClr val="phClr">
-                <a:tint val="45000"/>
-                <a:shade val="99000"/>
-                <a:satMod val="350000"/>
-              </a:schemeClr>
-            </a:gs>
-            <a:gs pos="100000">
-              <a:schemeClr val="phClr">
-                <a:shade val="20000"/>
-                <a:satMod val="255000"/>
-              </a:schemeClr>
-            </a:gs>
-          </a:gsLst>
-          <a:path path="circle">
-            <a:fillToRect l="50000" t="-80000" r="50000" b="180000"/>
-          </a:path>
-        </a:gradFill>
-        <a:gradFill rotWithShape="1">
-          <a:gsLst>
-            <a:gs pos="0">
-              <a:schemeClr val="phClr">
-                <a:tint val="80000"/>
-                <a:satMod val="300000"/>
-              </a:schemeClr>
-            </a:gs>
-            <a:gs pos="100000">
-              <a:schemeClr val="phClr">
-                <a:shade val="30000"/>
-                <a:satMod val="200000"/>
-              </a:schemeClr>
-            </a:gs>
-          </a:gsLst>
-          <a:path path="circle">
-            <a:fillToRect l="50000" t="50000" r="50000" b="50000"/>
-          </a:path>
-        </a:gradFill>
-      </a:bgFillStyleLst>
-    </a:fmtScheme>
-  </a:themeElements>
-</a:theme>
 </file>